--- a/longest_common_token_subsequence.pptx
+++ b/longest_common_token_subsequence.pptx
@@ -4,8 +4,12 @@
   <p:sldMasterIdLst>
     <p:sldMasterId id="2147483648" r:id="rId1"/>
   </p:sldMasterIdLst>
+  <p:notesMasterIdLst>
+    <p:notesMasterId r:id="rId4"/>
+  </p:notesMasterIdLst>
   <p:sldIdLst>
     <p:sldId id="256" r:id="rId2"/>
+    <p:sldId id="257" r:id="rId3"/>
   </p:sldIdLst>
   <p:sldSz cx="12192000" cy="6858000"/>
   <p:notesSz cx="6858000" cy="9144000"/>
@@ -104,7 +108,553 @@
       </a:defRPr>
     </a:lvl9pPr>
   </p:defaultTextStyle>
+  <p:extLst>
+    <p:ext uri="{EFAFB233-063F-42B5-8137-9DF3F51BA10A}">
+      <p15:sldGuideLst xmlns:p15="http://schemas.microsoft.com/office/powerpoint/2012/main"/>
+    </p:ext>
+  </p:extLst>
 </p:presentation>
+</file>
+
+<file path=ppt/notesMasters/notesMaster1.xml><?xml version="1.0" encoding="utf-8"?>
+<p:notesMaster xmlns:a="http://schemas.openxmlformats.org/drawingml/2006/main" xmlns:r="http://schemas.openxmlformats.org/officeDocument/2006/relationships" xmlns:p="http://schemas.openxmlformats.org/presentationml/2006/main">
+  <p:cSld>
+    <p:bg>
+      <p:bgRef idx="1001">
+        <a:schemeClr val="bg1"/>
+      </p:bgRef>
+    </p:bg>
+    <p:spTree>
+      <p:nvGrpSpPr>
+        <p:cNvPr id="1" name=""/>
+        <p:cNvGrpSpPr/>
+        <p:nvPr/>
+      </p:nvGrpSpPr>
+      <p:grpSpPr>
+        <a:xfrm>
+          <a:off x="0" y="0"/>
+          <a:ext cx="0" cy="0"/>
+          <a:chOff x="0" y="0"/>
+          <a:chExt cx="0" cy="0"/>
+        </a:xfrm>
+      </p:grpSpPr>
+      <p:sp>
+        <p:nvSpPr>
+          <p:cNvPr id="2" name="Header Placeholder 1"/>
+          <p:cNvSpPr>
+            <a:spLocks noGrp="1"/>
+          </p:cNvSpPr>
+          <p:nvPr>
+            <p:ph type="hdr" sz="quarter"/>
+          </p:nvPr>
+        </p:nvSpPr>
+        <p:spPr>
+          <a:xfrm>
+            <a:off x="0" y="0"/>
+            <a:ext cx="2971800" cy="458788"/>
+          </a:xfrm>
+          <a:prstGeom prst="rect">
+            <a:avLst/>
+          </a:prstGeom>
+        </p:spPr>
+        <p:txBody>
+          <a:bodyPr vert="horz" lIns="91440" tIns="45720" rIns="91440" bIns="45720" rtlCol="0"/>
+          <a:lstStyle>
+            <a:lvl1pPr algn="l">
+              <a:defRPr sz="1200"/>
+            </a:lvl1pPr>
+          </a:lstStyle>
+          <a:p>
+            <a:endParaRPr lang="en-US"/>
+          </a:p>
+        </p:txBody>
+      </p:sp>
+      <p:sp>
+        <p:nvSpPr>
+          <p:cNvPr id="3" name="Date Placeholder 2"/>
+          <p:cNvSpPr>
+            <a:spLocks noGrp="1"/>
+          </p:cNvSpPr>
+          <p:nvPr>
+            <p:ph type="dt" idx="1"/>
+          </p:nvPr>
+        </p:nvSpPr>
+        <p:spPr>
+          <a:xfrm>
+            <a:off x="3884613" y="0"/>
+            <a:ext cx="2971800" cy="458788"/>
+          </a:xfrm>
+          <a:prstGeom prst="rect">
+            <a:avLst/>
+          </a:prstGeom>
+        </p:spPr>
+        <p:txBody>
+          <a:bodyPr vert="horz" lIns="91440" tIns="45720" rIns="91440" bIns="45720" rtlCol="0"/>
+          <a:lstStyle>
+            <a:lvl1pPr algn="r">
+              <a:defRPr sz="1200"/>
+            </a:lvl1pPr>
+          </a:lstStyle>
+          <a:p>
+            <a:fld id="{28D0B58F-C5E4-494C-B06C-9FF71C87064F}" type="datetimeFigureOut">
+              <a:rPr lang="en-US" smtClean="0"/>
+              <a:t>4/22/2025</a:t>
+            </a:fld>
+            <a:endParaRPr lang="en-US"/>
+          </a:p>
+        </p:txBody>
+      </p:sp>
+      <p:sp>
+        <p:nvSpPr>
+          <p:cNvPr id="4" name="Slide Image Placeholder 3"/>
+          <p:cNvSpPr>
+            <a:spLocks noGrp="1" noRot="1" noChangeAspect="1"/>
+          </p:cNvSpPr>
+          <p:nvPr>
+            <p:ph type="sldImg" idx="2"/>
+          </p:nvPr>
+        </p:nvSpPr>
+        <p:spPr>
+          <a:xfrm>
+            <a:off x="685800" y="1143000"/>
+            <a:ext cx="5486400" cy="3086100"/>
+          </a:xfrm>
+          <a:prstGeom prst="rect">
+            <a:avLst/>
+          </a:prstGeom>
+          <a:noFill/>
+          <a:ln w="12700">
+            <a:solidFill>
+              <a:prstClr val="black"/>
+            </a:solidFill>
+          </a:ln>
+        </p:spPr>
+        <p:txBody>
+          <a:bodyPr vert="horz" lIns="91440" tIns="45720" rIns="91440" bIns="45720" rtlCol="0" anchor="ctr"/>
+          <a:lstStyle/>
+          <a:p>
+            <a:endParaRPr lang="en-US"/>
+          </a:p>
+        </p:txBody>
+      </p:sp>
+      <p:sp>
+        <p:nvSpPr>
+          <p:cNvPr id="5" name="Notes Placeholder 4"/>
+          <p:cNvSpPr>
+            <a:spLocks noGrp="1"/>
+          </p:cNvSpPr>
+          <p:nvPr>
+            <p:ph type="body" sz="quarter" idx="3"/>
+          </p:nvPr>
+        </p:nvSpPr>
+        <p:spPr>
+          <a:xfrm>
+            <a:off x="685800" y="4400550"/>
+            <a:ext cx="5486400" cy="3600450"/>
+          </a:xfrm>
+          <a:prstGeom prst="rect">
+            <a:avLst/>
+          </a:prstGeom>
+        </p:spPr>
+        <p:txBody>
+          <a:bodyPr vert="horz" lIns="91440" tIns="45720" rIns="91440" bIns="45720" rtlCol="0"/>
+          <a:lstStyle/>
+          <a:p>
+            <a:pPr lvl="0"/>
+            <a:r>
+              <a:rPr lang="en-US"/>
+              <a:t>Click to edit Master text styles</a:t>
+            </a:r>
+          </a:p>
+          <a:p>
+            <a:pPr lvl="1"/>
+            <a:r>
+              <a:rPr lang="en-US"/>
+              <a:t>Second level</a:t>
+            </a:r>
+          </a:p>
+          <a:p>
+            <a:pPr lvl="2"/>
+            <a:r>
+              <a:rPr lang="en-US"/>
+              <a:t>Third level</a:t>
+            </a:r>
+          </a:p>
+          <a:p>
+            <a:pPr lvl="3"/>
+            <a:r>
+              <a:rPr lang="en-US"/>
+              <a:t>Fourth level</a:t>
+            </a:r>
+          </a:p>
+          <a:p>
+            <a:pPr lvl="4"/>
+            <a:r>
+              <a:rPr lang="en-US"/>
+              <a:t>Fifth level</a:t>
+            </a:r>
+          </a:p>
+        </p:txBody>
+      </p:sp>
+      <p:sp>
+        <p:nvSpPr>
+          <p:cNvPr id="6" name="Footer Placeholder 5"/>
+          <p:cNvSpPr>
+            <a:spLocks noGrp="1"/>
+          </p:cNvSpPr>
+          <p:nvPr>
+            <p:ph type="ftr" sz="quarter" idx="4"/>
+          </p:nvPr>
+        </p:nvSpPr>
+        <p:spPr>
+          <a:xfrm>
+            <a:off x="0" y="8685213"/>
+            <a:ext cx="2971800" cy="458787"/>
+          </a:xfrm>
+          <a:prstGeom prst="rect">
+            <a:avLst/>
+          </a:prstGeom>
+        </p:spPr>
+        <p:txBody>
+          <a:bodyPr vert="horz" lIns="91440" tIns="45720" rIns="91440" bIns="45720" rtlCol="0" anchor="b"/>
+          <a:lstStyle>
+            <a:lvl1pPr algn="l">
+              <a:defRPr sz="1200"/>
+            </a:lvl1pPr>
+          </a:lstStyle>
+          <a:p>
+            <a:endParaRPr lang="en-US"/>
+          </a:p>
+        </p:txBody>
+      </p:sp>
+      <p:sp>
+        <p:nvSpPr>
+          <p:cNvPr id="7" name="Slide Number Placeholder 6"/>
+          <p:cNvSpPr>
+            <a:spLocks noGrp="1"/>
+          </p:cNvSpPr>
+          <p:nvPr>
+            <p:ph type="sldNum" sz="quarter" idx="5"/>
+          </p:nvPr>
+        </p:nvSpPr>
+        <p:spPr>
+          <a:xfrm>
+            <a:off x="3884613" y="8685213"/>
+            <a:ext cx="2971800" cy="458787"/>
+          </a:xfrm>
+          <a:prstGeom prst="rect">
+            <a:avLst/>
+          </a:prstGeom>
+        </p:spPr>
+        <p:txBody>
+          <a:bodyPr vert="horz" lIns="91440" tIns="45720" rIns="91440" bIns="45720" rtlCol="0" anchor="b"/>
+          <a:lstStyle>
+            <a:lvl1pPr algn="r">
+              <a:defRPr sz="1200"/>
+            </a:lvl1pPr>
+          </a:lstStyle>
+          <a:p>
+            <a:fld id="{BCD697E7-4600-4BFF-B772-F324BE470D1A}" type="slidenum">
+              <a:rPr lang="en-US" smtClean="0"/>
+              <a:t>‹#›</a:t>
+            </a:fld>
+            <a:endParaRPr lang="en-US"/>
+          </a:p>
+        </p:txBody>
+      </p:sp>
+    </p:spTree>
+    <p:extLst>
+      <p:ext uri="{BB962C8B-B14F-4D97-AF65-F5344CB8AC3E}">
+        <p14:creationId xmlns:p14="http://schemas.microsoft.com/office/powerpoint/2010/main" val="1797902368"/>
+      </p:ext>
+    </p:extLst>
+  </p:cSld>
+  <p:clrMap bg1="lt1" tx1="dk1" bg2="lt2" tx2="dk2" accent1="accent1" accent2="accent2" accent3="accent3" accent4="accent4" accent5="accent5" accent6="accent6" hlink="hlink" folHlink="folHlink"/>
+  <p:notesStyle>
+    <a:lvl1pPr marL="0" algn="l" defTabSz="914400" rtl="0" eaLnBrk="1" latinLnBrk="0" hangingPunct="1">
+      <a:defRPr sz="1200" kern="1200">
+        <a:solidFill>
+          <a:schemeClr val="tx1"/>
+        </a:solidFill>
+        <a:latin typeface="+mn-lt"/>
+        <a:ea typeface="+mn-ea"/>
+        <a:cs typeface="+mn-cs"/>
+      </a:defRPr>
+    </a:lvl1pPr>
+    <a:lvl2pPr marL="457200" algn="l" defTabSz="914400" rtl="0" eaLnBrk="1" latinLnBrk="0" hangingPunct="1">
+      <a:defRPr sz="1200" kern="1200">
+        <a:solidFill>
+          <a:schemeClr val="tx1"/>
+        </a:solidFill>
+        <a:latin typeface="+mn-lt"/>
+        <a:ea typeface="+mn-ea"/>
+        <a:cs typeface="+mn-cs"/>
+      </a:defRPr>
+    </a:lvl2pPr>
+    <a:lvl3pPr marL="914400" algn="l" defTabSz="914400" rtl="0" eaLnBrk="1" latinLnBrk="0" hangingPunct="1">
+      <a:defRPr sz="1200" kern="1200">
+        <a:solidFill>
+          <a:schemeClr val="tx1"/>
+        </a:solidFill>
+        <a:latin typeface="+mn-lt"/>
+        <a:ea typeface="+mn-ea"/>
+        <a:cs typeface="+mn-cs"/>
+      </a:defRPr>
+    </a:lvl3pPr>
+    <a:lvl4pPr marL="1371600" algn="l" defTabSz="914400" rtl="0" eaLnBrk="1" latinLnBrk="0" hangingPunct="1">
+      <a:defRPr sz="1200" kern="1200">
+        <a:solidFill>
+          <a:schemeClr val="tx1"/>
+        </a:solidFill>
+        <a:latin typeface="+mn-lt"/>
+        <a:ea typeface="+mn-ea"/>
+        <a:cs typeface="+mn-cs"/>
+      </a:defRPr>
+    </a:lvl4pPr>
+    <a:lvl5pPr marL="1828800" algn="l" defTabSz="914400" rtl="0" eaLnBrk="1" latinLnBrk="0" hangingPunct="1">
+      <a:defRPr sz="1200" kern="1200">
+        <a:solidFill>
+          <a:schemeClr val="tx1"/>
+        </a:solidFill>
+        <a:latin typeface="+mn-lt"/>
+        <a:ea typeface="+mn-ea"/>
+        <a:cs typeface="+mn-cs"/>
+      </a:defRPr>
+    </a:lvl5pPr>
+    <a:lvl6pPr marL="2286000" algn="l" defTabSz="914400" rtl="0" eaLnBrk="1" latinLnBrk="0" hangingPunct="1">
+      <a:defRPr sz="1200" kern="1200">
+        <a:solidFill>
+          <a:schemeClr val="tx1"/>
+        </a:solidFill>
+        <a:latin typeface="+mn-lt"/>
+        <a:ea typeface="+mn-ea"/>
+        <a:cs typeface="+mn-cs"/>
+      </a:defRPr>
+    </a:lvl6pPr>
+    <a:lvl7pPr marL="2743200" algn="l" defTabSz="914400" rtl="0" eaLnBrk="1" latinLnBrk="0" hangingPunct="1">
+      <a:defRPr sz="1200" kern="1200">
+        <a:solidFill>
+          <a:schemeClr val="tx1"/>
+        </a:solidFill>
+        <a:latin typeface="+mn-lt"/>
+        <a:ea typeface="+mn-ea"/>
+        <a:cs typeface="+mn-cs"/>
+      </a:defRPr>
+    </a:lvl7pPr>
+    <a:lvl8pPr marL="3200400" algn="l" defTabSz="914400" rtl="0" eaLnBrk="1" latinLnBrk="0" hangingPunct="1">
+      <a:defRPr sz="1200" kern="1200">
+        <a:solidFill>
+          <a:schemeClr val="tx1"/>
+        </a:solidFill>
+        <a:latin typeface="+mn-lt"/>
+        <a:ea typeface="+mn-ea"/>
+        <a:cs typeface="+mn-cs"/>
+      </a:defRPr>
+    </a:lvl8pPr>
+    <a:lvl9pPr marL="3657600" algn="l" defTabSz="914400" rtl="0" eaLnBrk="1" latinLnBrk="0" hangingPunct="1">
+      <a:defRPr sz="1200" kern="1200">
+        <a:solidFill>
+          <a:schemeClr val="tx1"/>
+        </a:solidFill>
+        <a:latin typeface="+mn-lt"/>
+        <a:ea typeface="+mn-ea"/>
+        <a:cs typeface="+mn-cs"/>
+      </a:defRPr>
+    </a:lvl9pPr>
+  </p:notesStyle>
+</p:notesMaster>
+</file>
+
+<file path=ppt/notesSlides/notesSlide1.xml><?xml version="1.0" encoding="utf-8"?>
+<p:notes xmlns:a="http://schemas.openxmlformats.org/drawingml/2006/main" xmlns:r="http://schemas.openxmlformats.org/officeDocument/2006/relationships" xmlns:p="http://schemas.openxmlformats.org/presentationml/2006/main">
+  <p:cSld>
+    <p:spTree>
+      <p:nvGrpSpPr>
+        <p:cNvPr id="1" name=""/>
+        <p:cNvGrpSpPr/>
+        <p:nvPr/>
+      </p:nvGrpSpPr>
+      <p:grpSpPr>
+        <a:xfrm>
+          <a:off x="0" y="0"/>
+          <a:ext cx="0" cy="0"/>
+          <a:chOff x="0" y="0"/>
+          <a:chExt cx="0" cy="0"/>
+        </a:xfrm>
+      </p:grpSpPr>
+      <p:sp>
+        <p:nvSpPr>
+          <p:cNvPr id="2" name="Slide Image Placeholder 1"/>
+          <p:cNvSpPr>
+            <a:spLocks noGrp="1" noRot="1" noChangeAspect="1"/>
+          </p:cNvSpPr>
+          <p:nvPr>
+            <p:ph type="sldImg"/>
+          </p:nvPr>
+        </p:nvSpPr>
+        <p:spPr/>
+      </p:sp>
+      <p:sp>
+        <p:nvSpPr>
+          <p:cNvPr id="3" name="Notes Placeholder 2"/>
+          <p:cNvSpPr>
+            <a:spLocks noGrp="1"/>
+          </p:cNvSpPr>
+          <p:nvPr>
+            <p:ph type="body" idx="1"/>
+          </p:nvPr>
+        </p:nvSpPr>
+        <p:spPr/>
+        <p:txBody>
+          <a:bodyPr/>
+          <a:lstStyle/>
+          <a:p>
+            <a:endParaRPr lang="en-US" dirty="0"/>
+          </a:p>
+        </p:txBody>
+      </p:sp>
+      <p:sp>
+        <p:nvSpPr>
+          <p:cNvPr id="4" name="Slide Number Placeholder 3"/>
+          <p:cNvSpPr>
+            <a:spLocks noGrp="1"/>
+          </p:cNvSpPr>
+          <p:nvPr>
+            <p:ph type="sldNum" sz="quarter" idx="5"/>
+          </p:nvPr>
+        </p:nvSpPr>
+        <p:spPr/>
+        <p:txBody>
+          <a:bodyPr/>
+          <a:lstStyle/>
+          <a:p>
+            <a:fld id="{BCD697E7-4600-4BFF-B772-F324BE470D1A}" type="slidenum">
+              <a:rPr lang="en-US" smtClean="0"/>
+              <a:t>1</a:t>
+            </a:fld>
+            <a:endParaRPr lang="en-US"/>
+          </a:p>
+        </p:txBody>
+      </p:sp>
+    </p:spTree>
+    <p:extLst>
+      <p:ext uri="{BB962C8B-B14F-4D97-AF65-F5344CB8AC3E}">
+        <p14:creationId xmlns:p14="http://schemas.microsoft.com/office/powerpoint/2010/main" val="1441628267"/>
+      </p:ext>
+    </p:extLst>
+  </p:cSld>
+  <p:clrMapOvr>
+    <a:masterClrMapping/>
+  </p:clrMapOvr>
+</p:notes>
+</file>
+
+<file path=ppt/notesSlides/notesSlide2.xml><?xml version="1.0" encoding="utf-8"?>
+<p:notes xmlns:a="http://schemas.openxmlformats.org/drawingml/2006/main" xmlns:r="http://schemas.openxmlformats.org/officeDocument/2006/relationships" xmlns:p="http://schemas.openxmlformats.org/presentationml/2006/main">
+  <p:cSld>
+    <p:spTree>
+      <p:nvGrpSpPr>
+        <p:cNvPr id="1" name="">
+          <a:extLst>
+            <a:ext uri="{FF2B5EF4-FFF2-40B4-BE49-F238E27FC236}">
+              <a16:creationId xmlns:a16="http://schemas.microsoft.com/office/drawing/2014/main" id="{60C7659F-DF1F-5EF0-F6FF-69E52EBCA808}"/>
+            </a:ext>
+          </a:extLst>
+        </p:cNvPr>
+        <p:cNvGrpSpPr/>
+        <p:nvPr/>
+      </p:nvGrpSpPr>
+      <p:grpSpPr>
+        <a:xfrm>
+          <a:off x="0" y="0"/>
+          <a:ext cx="0" cy="0"/>
+          <a:chOff x="0" y="0"/>
+          <a:chExt cx="0" cy="0"/>
+        </a:xfrm>
+      </p:grpSpPr>
+      <p:sp>
+        <p:nvSpPr>
+          <p:cNvPr id="2" name="Slide Image Placeholder 1">
+            <a:extLst>
+              <a:ext uri="{FF2B5EF4-FFF2-40B4-BE49-F238E27FC236}">
+                <a16:creationId xmlns:a16="http://schemas.microsoft.com/office/drawing/2014/main" id="{95E1FB3E-5627-4565-72B1-CFF87F02B812}"/>
+              </a:ext>
+            </a:extLst>
+          </p:cNvPr>
+          <p:cNvSpPr>
+            <a:spLocks noGrp="1" noRot="1" noChangeAspect="1"/>
+          </p:cNvSpPr>
+          <p:nvPr>
+            <p:ph type="sldImg"/>
+          </p:nvPr>
+        </p:nvSpPr>
+        <p:spPr/>
+      </p:sp>
+      <p:sp>
+        <p:nvSpPr>
+          <p:cNvPr id="3" name="Notes Placeholder 2">
+            <a:extLst>
+              <a:ext uri="{FF2B5EF4-FFF2-40B4-BE49-F238E27FC236}">
+                <a16:creationId xmlns:a16="http://schemas.microsoft.com/office/drawing/2014/main" id="{647ECE9E-61D1-90A5-11E3-EC15E5C31D85}"/>
+              </a:ext>
+            </a:extLst>
+          </p:cNvPr>
+          <p:cNvSpPr>
+            <a:spLocks noGrp="1"/>
+          </p:cNvSpPr>
+          <p:nvPr>
+            <p:ph type="body" idx="1"/>
+          </p:nvPr>
+        </p:nvSpPr>
+        <p:spPr/>
+        <p:txBody>
+          <a:bodyPr/>
+          <a:lstStyle/>
+          <a:p>
+            <a:endParaRPr lang="en-US" dirty="0"/>
+          </a:p>
+        </p:txBody>
+      </p:sp>
+      <p:sp>
+        <p:nvSpPr>
+          <p:cNvPr id="4" name="Slide Number Placeholder 3">
+            <a:extLst>
+              <a:ext uri="{FF2B5EF4-FFF2-40B4-BE49-F238E27FC236}">
+                <a16:creationId xmlns:a16="http://schemas.microsoft.com/office/drawing/2014/main" id="{3D507DEF-F29D-9064-F4C1-7D55AE75C1BC}"/>
+              </a:ext>
+            </a:extLst>
+          </p:cNvPr>
+          <p:cNvSpPr>
+            <a:spLocks noGrp="1"/>
+          </p:cNvSpPr>
+          <p:nvPr>
+            <p:ph type="sldNum" sz="quarter" idx="5"/>
+          </p:nvPr>
+        </p:nvSpPr>
+        <p:spPr/>
+        <p:txBody>
+          <a:bodyPr/>
+          <a:lstStyle/>
+          <a:p>
+            <a:fld id="{BCD697E7-4600-4BFF-B772-F324BE470D1A}" type="slidenum">
+              <a:rPr lang="en-US" smtClean="0"/>
+              <a:t>2</a:t>
+            </a:fld>
+            <a:endParaRPr lang="en-US"/>
+          </a:p>
+        </p:txBody>
+      </p:sp>
+    </p:spTree>
+    <p:extLst>
+      <p:ext uri="{BB962C8B-B14F-4D97-AF65-F5344CB8AC3E}">
+        <p14:creationId xmlns:p14="http://schemas.microsoft.com/office/powerpoint/2010/main" val="3149358247"/>
+      </p:ext>
+    </p:extLst>
+  </p:cSld>
+  <p:clrMapOvr>
+    <a:masterClrMapping/>
+  </p:clrMapOvr>
+</p:notes>
 </file>
 
 <file path=ppt/slideLayouts/slideLayout1.xml><?xml version="1.0" encoding="utf-8"?>
@@ -254,7 +804,7 @@
           <a:p>
             <a:fld id="{C83706B5-04B4-4921-9870-F7222E8094BB}" type="datetimeFigureOut">
               <a:rPr lang="en-US" smtClean="0"/>
-              <a:t>3/2/2025</a:t>
+              <a:t>4/22/2025</a:t>
             </a:fld>
             <a:endParaRPr lang="en-US"/>
           </a:p>
@@ -452,7 +1002,7 @@
           <a:p>
             <a:fld id="{C83706B5-04B4-4921-9870-F7222E8094BB}" type="datetimeFigureOut">
               <a:rPr lang="en-US" smtClean="0"/>
-              <a:t>3/2/2025</a:t>
+              <a:t>4/22/2025</a:t>
             </a:fld>
             <a:endParaRPr lang="en-US"/>
           </a:p>
@@ -660,7 +1210,7 @@
           <a:p>
             <a:fld id="{C83706B5-04B4-4921-9870-F7222E8094BB}" type="datetimeFigureOut">
               <a:rPr lang="en-US" smtClean="0"/>
-              <a:t>3/2/2025</a:t>
+              <a:t>4/22/2025</a:t>
             </a:fld>
             <a:endParaRPr lang="en-US"/>
           </a:p>
@@ -858,7 +1408,7 @@
           <a:p>
             <a:fld id="{C83706B5-04B4-4921-9870-F7222E8094BB}" type="datetimeFigureOut">
               <a:rPr lang="en-US" smtClean="0"/>
-              <a:t>3/2/2025</a:t>
+              <a:t>4/22/2025</a:t>
             </a:fld>
             <a:endParaRPr lang="en-US"/>
           </a:p>
@@ -1133,7 +1683,7 @@
           <a:p>
             <a:fld id="{C83706B5-04B4-4921-9870-F7222E8094BB}" type="datetimeFigureOut">
               <a:rPr lang="en-US" smtClean="0"/>
-              <a:t>3/2/2025</a:t>
+              <a:t>4/22/2025</a:t>
             </a:fld>
             <a:endParaRPr lang="en-US"/>
           </a:p>
@@ -1398,7 +1948,7 @@
           <a:p>
             <a:fld id="{C83706B5-04B4-4921-9870-F7222E8094BB}" type="datetimeFigureOut">
               <a:rPr lang="en-US" smtClean="0"/>
-              <a:t>3/2/2025</a:t>
+              <a:t>4/22/2025</a:t>
             </a:fld>
             <a:endParaRPr lang="en-US"/>
           </a:p>
@@ -1810,7 +2360,7 @@
           <a:p>
             <a:fld id="{C83706B5-04B4-4921-9870-F7222E8094BB}" type="datetimeFigureOut">
               <a:rPr lang="en-US" smtClean="0"/>
-              <a:t>3/2/2025</a:t>
+              <a:t>4/22/2025</a:t>
             </a:fld>
             <a:endParaRPr lang="en-US"/>
           </a:p>
@@ -1951,7 +2501,7 @@
           <a:p>
             <a:fld id="{C83706B5-04B4-4921-9870-F7222E8094BB}" type="datetimeFigureOut">
               <a:rPr lang="en-US" smtClean="0"/>
-              <a:t>3/2/2025</a:t>
+              <a:t>4/22/2025</a:t>
             </a:fld>
             <a:endParaRPr lang="en-US"/>
           </a:p>
@@ -2064,7 +2614,7 @@
           <a:p>
             <a:fld id="{C83706B5-04B4-4921-9870-F7222E8094BB}" type="datetimeFigureOut">
               <a:rPr lang="en-US" smtClean="0"/>
-              <a:t>3/2/2025</a:t>
+              <a:t>4/22/2025</a:t>
             </a:fld>
             <a:endParaRPr lang="en-US"/>
           </a:p>
@@ -2375,7 +2925,7 @@
           <a:p>
             <a:fld id="{C83706B5-04B4-4921-9870-F7222E8094BB}" type="datetimeFigureOut">
               <a:rPr lang="en-US" smtClean="0"/>
-              <a:t>3/2/2025</a:t>
+              <a:t>4/22/2025</a:t>
             </a:fld>
             <a:endParaRPr lang="en-US"/>
           </a:p>
@@ -2663,7 +3213,7 @@
           <a:p>
             <a:fld id="{C83706B5-04B4-4921-9870-F7222E8094BB}" type="datetimeFigureOut">
               <a:rPr lang="en-US" smtClean="0"/>
-              <a:t>3/2/2025</a:t>
+              <a:t>4/22/2025</a:t>
             </a:fld>
             <a:endParaRPr lang="en-US"/>
           </a:p>
@@ -2904,7 +3454,7 @@
           <a:p>
             <a:fld id="{C83706B5-04B4-4921-9870-F7222E8094BB}" type="datetimeFigureOut">
               <a:rPr lang="en-US" smtClean="0"/>
-              <a:t>3/2/2025</a:t>
+              <a:t>4/22/2025</a:t>
             </a:fld>
             <a:endParaRPr lang="en-US"/>
           </a:p>
@@ -7792,6 +8342,4341 @@
 </p:sld>
 </file>
 
+<file path=ppt/slides/slide2.xml><?xml version="1.0" encoding="utf-8"?>
+<p:sld xmlns:a="http://schemas.openxmlformats.org/drawingml/2006/main" xmlns:r="http://schemas.openxmlformats.org/officeDocument/2006/relationships" xmlns:p="http://schemas.openxmlformats.org/presentationml/2006/main">
+  <p:cSld>
+    <p:spTree>
+      <p:nvGrpSpPr>
+        <p:cNvPr id="1" name="">
+          <a:extLst>
+            <a:ext uri="{FF2B5EF4-FFF2-40B4-BE49-F238E27FC236}">
+              <a16:creationId xmlns:a16="http://schemas.microsoft.com/office/drawing/2014/main" id="{96131ACC-064F-6D7D-38C5-7C1D6043B3B0}"/>
+            </a:ext>
+          </a:extLst>
+        </p:cNvPr>
+        <p:cNvGrpSpPr/>
+        <p:nvPr/>
+      </p:nvGrpSpPr>
+      <p:grpSpPr>
+        <a:xfrm>
+          <a:off x="0" y="0"/>
+          <a:ext cx="0" cy="0"/>
+          <a:chOff x="0" y="0"/>
+          <a:chExt cx="0" cy="0"/>
+        </a:xfrm>
+      </p:grpSpPr>
+      <p:graphicFrame>
+        <p:nvGraphicFramePr>
+          <p:cNvPr id="4" name="Table 3">
+            <a:extLst>
+              <a:ext uri="{FF2B5EF4-FFF2-40B4-BE49-F238E27FC236}">
+                <a16:creationId xmlns:a16="http://schemas.microsoft.com/office/drawing/2014/main" id="{9BCC4B6D-BDEA-DF9E-9221-18F5CEF1A38E}"/>
+              </a:ext>
+            </a:extLst>
+          </p:cNvPr>
+          <p:cNvGraphicFramePr>
+            <a:graphicFrameLocks noGrp="1"/>
+          </p:cNvGraphicFramePr>
+          <p:nvPr>
+            <p:extLst>
+              <p:ext uri="{D42A27DB-BD31-4B8C-83A1-F6EECF244321}">
+                <p14:modId xmlns:p14="http://schemas.microsoft.com/office/powerpoint/2010/main" val="3709323379"/>
+              </p:ext>
+            </p:extLst>
+          </p:nvPr>
+        </p:nvGraphicFramePr>
+        <p:xfrm>
+          <a:off x="1182914" y="1601409"/>
+          <a:ext cx="2686960" cy="3337560"/>
+        </p:xfrm>
+        <a:graphic>
+          <a:graphicData uri="http://schemas.openxmlformats.org/drawingml/2006/table">
+            <a:tbl>
+              <a:tblPr firstRow="1" bandRow="1">
+                <a:tableStyleId>{5C22544A-7EE6-4342-B048-85BDC9FD1C3A}</a:tableStyleId>
+              </a:tblPr>
+              <a:tblGrid>
+                <a:gridCol w="335870">
+                  <a:extLst>
+                    <a:ext uri="{9D8B030D-6E8A-4147-A177-3AD203B41FA5}">
+                      <a16:colId xmlns:a16="http://schemas.microsoft.com/office/drawing/2014/main" val="4049008226"/>
+                    </a:ext>
+                  </a:extLst>
+                </a:gridCol>
+                <a:gridCol w="335870">
+                  <a:extLst>
+                    <a:ext uri="{9D8B030D-6E8A-4147-A177-3AD203B41FA5}">
+                      <a16:colId xmlns:a16="http://schemas.microsoft.com/office/drawing/2014/main" val="3478397847"/>
+                    </a:ext>
+                  </a:extLst>
+                </a:gridCol>
+                <a:gridCol w="335870">
+                  <a:extLst>
+                    <a:ext uri="{9D8B030D-6E8A-4147-A177-3AD203B41FA5}">
+                      <a16:colId xmlns:a16="http://schemas.microsoft.com/office/drawing/2014/main" val="3287294923"/>
+                    </a:ext>
+                  </a:extLst>
+                </a:gridCol>
+                <a:gridCol w="335870">
+                  <a:extLst>
+                    <a:ext uri="{9D8B030D-6E8A-4147-A177-3AD203B41FA5}">
+                      <a16:colId xmlns:a16="http://schemas.microsoft.com/office/drawing/2014/main" val="2977211747"/>
+                    </a:ext>
+                  </a:extLst>
+                </a:gridCol>
+                <a:gridCol w="335870">
+                  <a:extLst>
+                    <a:ext uri="{9D8B030D-6E8A-4147-A177-3AD203B41FA5}">
+                      <a16:colId xmlns:a16="http://schemas.microsoft.com/office/drawing/2014/main" val="3693455604"/>
+                    </a:ext>
+                  </a:extLst>
+                </a:gridCol>
+                <a:gridCol w="335870">
+                  <a:extLst>
+                    <a:ext uri="{9D8B030D-6E8A-4147-A177-3AD203B41FA5}">
+                      <a16:colId xmlns:a16="http://schemas.microsoft.com/office/drawing/2014/main" val="1044826715"/>
+                    </a:ext>
+                  </a:extLst>
+                </a:gridCol>
+                <a:gridCol w="335870">
+                  <a:extLst>
+                    <a:ext uri="{9D8B030D-6E8A-4147-A177-3AD203B41FA5}">
+                      <a16:colId xmlns:a16="http://schemas.microsoft.com/office/drawing/2014/main" val="1787000519"/>
+                    </a:ext>
+                  </a:extLst>
+                </a:gridCol>
+                <a:gridCol w="335870">
+                  <a:extLst>
+                    <a:ext uri="{9D8B030D-6E8A-4147-A177-3AD203B41FA5}">
+                      <a16:colId xmlns:a16="http://schemas.microsoft.com/office/drawing/2014/main" val="1257803747"/>
+                    </a:ext>
+                  </a:extLst>
+                </a:gridCol>
+              </a:tblGrid>
+              <a:tr h="370840">
+                <a:tc>
+                  <a:txBody>
+                    <a:bodyPr/>
+                    <a:lstStyle/>
+                    <a:p>
+                      <a:endParaRPr lang="en-US" sz="1800" b="1" kern="1200" dirty="0">
+                        <a:solidFill>
+                          <a:schemeClr val="lt1"/>
+                        </a:solidFill>
+                        <a:latin typeface="+mn-lt"/>
+                        <a:ea typeface="+mn-ea"/>
+                        <a:cs typeface="+mn-cs"/>
+                      </a:endParaRPr>
+                    </a:p>
+                  </a:txBody>
+                  <a:tcPr/>
+                </a:tc>
+                <a:tc>
+                  <a:txBody>
+                    <a:bodyPr/>
+                    <a:lstStyle/>
+                    <a:p>
+                      <a:r>
+                        <a:rPr lang="en-US" dirty="0"/>
+                        <a:t>a</a:t>
+                      </a:r>
+                    </a:p>
+                  </a:txBody>
+                  <a:tcPr/>
+                </a:tc>
+                <a:tc>
+                  <a:txBody>
+                    <a:bodyPr/>
+                    <a:lstStyle/>
+                    <a:p>
+                      <a:r>
+                        <a:rPr lang="en-US" dirty="0"/>
+                        <a:t>b</a:t>
+                      </a:r>
+                    </a:p>
+                  </a:txBody>
+                  <a:tcPr/>
+                </a:tc>
+                <a:tc>
+                  <a:txBody>
+                    <a:bodyPr/>
+                    <a:lstStyle/>
+                    <a:p>
+                      <a:r>
+                        <a:rPr lang="en-US" dirty="0"/>
+                        <a:t>b</a:t>
+                      </a:r>
+                    </a:p>
+                  </a:txBody>
+                  <a:tcPr/>
+                </a:tc>
+                <a:tc>
+                  <a:txBody>
+                    <a:bodyPr/>
+                    <a:lstStyle/>
+                    <a:p>
+                      <a:r>
+                        <a:rPr lang="en-US" dirty="0"/>
+                        <a:t>c</a:t>
+                      </a:r>
+                    </a:p>
+                  </a:txBody>
+                  <a:tcPr/>
+                </a:tc>
+                <a:tc>
+                  <a:txBody>
+                    <a:bodyPr/>
+                    <a:lstStyle/>
+                    <a:p>
+                      <a:r>
+                        <a:rPr lang="en-US" dirty="0"/>
+                        <a:t>c</a:t>
+                      </a:r>
+                    </a:p>
+                  </a:txBody>
+                  <a:tcPr/>
+                </a:tc>
+                <a:tc>
+                  <a:txBody>
+                    <a:bodyPr/>
+                    <a:lstStyle/>
+                    <a:p>
+                      <a:endParaRPr lang="en-US" dirty="0"/>
+                    </a:p>
+                  </a:txBody>
+                  <a:tcPr/>
+                </a:tc>
+                <a:tc>
+                  <a:txBody>
+                    <a:bodyPr/>
+                    <a:lstStyle/>
+                    <a:p>
+                      <a:endParaRPr lang="en-US" dirty="0"/>
+                    </a:p>
+                  </a:txBody>
+                  <a:tcPr>
+                    <a:solidFill>
+                      <a:schemeClr val="bg1">
+                        <a:lumMod val="50000"/>
+                      </a:schemeClr>
+                    </a:solidFill>
+                  </a:tcPr>
+                </a:tc>
+                <a:extLst>
+                  <a:ext uri="{0D108BD9-81ED-4DB2-BD59-A6C34878D82A}">
+                    <a16:rowId xmlns:a16="http://schemas.microsoft.com/office/drawing/2014/main" val="2410859909"/>
+                  </a:ext>
+                </a:extLst>
+              </a:tr>
+              <a:tr h="370840">
+                <a:tc>
+                  <a:txBody>
+                    <a:bodyPr/>
+                    <a:lstStyle/>
+                    <a:p>
+                      <a:r>
+                        <a:rPr lang="en-US" sz="1800" b="1" kern="1200" dirty="0">
+                          <a:solidFill>
+                            <a:schemeClr val="lt1"/>
+                          </a:solidFill>
+                          <a:latin typeface="+mn-lt"/>
+                          <a:ea typeface="+mn-ea"/>
+                          <a:cs typeface="+mn-cs"/>
+                        </a:rPr>
+                        <a:t>a</a:t>
+                      </a:r>
+                    </a:p>
+                  </a:txBody>
+                  <a:tcPr>
+                    <a:solidFill>
+                      <a:schemeClr val="accent1"/>
+                    </a:solidFill>
+                  </a:tcPr>
+                </a:tc>
+                <a:tc>
+                  <a:txBody>
+                    <a:bodyPr/>
+                    <a:lstStyle/>
+                    <a:p>
+                      <a:r>
+                        <a:rPr lang="en-US" dirty="0">
+                          <a:solidFill>
+                            <a:srgbClr val="FF0000"/>
+                          </a:solidFill>
+                        </a:rPr>
+                        <a:t>3</a:t>
+                      </a:r>
+                    </a:p>
+                  </a:txBody>
+                  <a:tcPr/>
+                </a:tc>
+                <a:tc>
+                  <a:txBody>
+                    <a:bodyPr/>
+                    <a:lstStyle/>
+                    <a:p>
+                      <a:r>
+                        <a:rPr lang="en-US" dirty="0"/>
+                        <a:t>2</a:t>
+                      </a:r>
+                    </a:p>
+                  </a:txBody>
+                  <a:tcPr/>
+                </a:tc>
+                <a:tc>
+                  <a:txBody>
+                    <a:bodyPr/>
+                    <a:lstStyle/>
+                    <a:p>
+                      <a:r>
+                        <a:rPr lang="en-US" dirty="0"/>
+                        <a:t>2</a:t>
+                      </a:r>
+                    </a:p>
+                  </a:txBody>
+                  <a:tcPr/>
+                </a:tc>
+                <a:tc>
+                  <a:txBody>
+                    <a:bodyPr/>
+                    <a:lstStyle/>
+                    <a:p>
+                      <a:r>
+                        <a:rPr lang="en-US" dirty="0"/>
+                        <a:t>1</a:t>
+                      </a:r>
+                    </a:p>
+                  </a:txBody>
+                  <a:tcPr/>
+                </a:tc>
+                <a:tc>
+                  <a:txBody>
+                    <a:bodyPr/>
+                    <a:lstStyle/>
+                    <a:p>
+                      <a:r>
+                        <a:rPr lang="en-US" dirty="0"/>
+                        <a:t>1</a:t>
+                      </a:r>
+                    </a:p>
+                  </a:txBody>
+                  <a:tcPr/>
+                </a:tc>
+                <a:tc>
+                  <a:txBody>
+                    <a:bodyPr/>
+                    <a:lstStyle/>
+                    <a:p>
+                      <a:r>
+                        <a:rPr lang="en-US" dirty="0"/>
+                        <a:t>0</a:t>
+                      </a:r>
+                    </a:p>
+                  </a:txBody>
+                  <a:tcPr/>
+                </a:tc>
+                <a:tc>
+                  <a:txBody>
+                    <a:bodyPr/>
+                    <a:lstStyle/>
+                    <a:p>
+                      <a:endParaRPr lang="en-US" dirty="0"/>
+                    </a:p>
+                  </a:txBody>
+                  <a:tcPr>
+                    <a:solidFill>
+                      <a:schemeClr val="bg1">
+                        <a:lumMod val="50000"/>
+                      </a:schemeClr>
+                    </a:solidFill>
+                  </a:tcPr>
+                </a:tc>
+                <a:extLst>
+                  <a:ext uri="{0D108BD9-81ED-4DB2-BD59-A6C34878D82A}">
+                    <a16:rowId xmlns:a16="http://schemas.microsoft.com/office/drawing/2014/main" val="2314656069"/>
+                  </a:ext>
+                </a:extLst>
+              </a:tr>
+              <a:tr h="370840">
+                <a:tc>
+                  <a:txBody>
+                    <a:bodyPr/>
+                    <a:lstStyle/>
+                    <a:p>
+                      <a:r>
+                        <a:rPr lang="en-US" sz="1800" b="1" kern="1200" dirty="0">
+                          <a:solidFill>
+                            <a:schemeClr val="lt1"/>
+                          </a:solidFill>
+                          <a:latin typeface="+mn-lt"/>
+                          <a:ea typeface="+mn-ea"/>
+                          <a:cs typeface="+mn-cs"/>
+                        </a:rPr>
+                        <a:t>b</a:t>
+                      </a:r>
+                    </a:p>
+                  </a:txBody>
+                  <a:tcPr>
+                    <a:solidFill>
+                      <a:schemeClr val="accent1"/>
+                    </a:solidFill>
+                  </a:tcPr>
+                </a:tc>
+                <a:tc>
+                  <a:txBody>
+                    <a:bodyPr/>
+                    <a:lstStyle/>
+                    <a:p>
+                      <a:r>
+                        <a:rPr lang="en-US" dirty="0"/>
+                        <a:t>2</a:t>
+                      </a:r>
+                    </a:p>
+                  </a:txBody>
+                  <a:tcPr/>
+                </a:tc>
+                <a:tc>
+                  <a:txBody>
+                    <a:bodyPr/>
+                    <a:lstStyle/>
+                    <a:p>
+                      <a:r>
+                        <a:rPr lang="en-US" dirty="0">
+                          <a:solidFill>
+                            <a:srgbClr val="FF0000"/>
+                          </a:solidFill>
+                        </a:rPr>
+                        <a:t>2</a:t>
+                      </a:r>
+                    </a:p>
+                  </a:txBody>
+                  <a:tcPr/>
+                </a:tc>
+                <a:tc>
+                  <a:txBody>
+                    <a:bodyPr/>
+                    <a:lstStyle/>
+                    <a:p>
+                      <a:r>
+                        <a:rPr lang="en-US" dirty="0">
+                          <a:solidFill>
+                            <a:srgbClr val="FF0000"/>
+                          </a:solidFill>
+                        </a:rPr>
+                        <a:t>2</a:t>
+                      </a:r>
+                    </a:p>
+                  </a:txBody>
+                  <a:tcPr/>
+                </a:tc>
+                <a:tc>
+                  <a:txBody>
+                    <a:bodyPr/>
+                    <a:lstStyle/>
+                    <a:p>
+                      <a:r>
+                        <a:rPr lang="en-US" dirty="0"/>
+                        <a:t>1</a:t>
+                      </a:r>
+                    </a:p>
+                  </a:txBody>
+                  <a:tcPr/>
+                </a:tc>
+                <a:tc>
+                  <a:txBody>
+                    <a:bodyPr/>
+                    <a:lstStyle/>
+                    <a:p>
+                      <a:r>
+                        <a:rPr lang="en-US" dirty="0"/>
+                        <a:t>1</a:t>
+                      </a:r>
+                    </a:p>
+                  </a:txBody>
+                  <a:tcPr/>
+                </a:tc>
+                <a:tc>
+                  <a:txBody>
+                    <a:bodyPr/>
+                    <a:lstStyle/>
+                    <a:p>
+                      <a:r>
+                        <a:rPr lang="en-US" dirty="0"/>
+                        <a:t>0</a:t>
+                      </a:r>
+                    </a:p>
+                  </a:txBody>
+                  <a:tcPr/>
+                </a:tc>
+                <a:tc>
+                  <a:txBody>
+                    <a:bodyPr/>
+                    <a:lstStyle/>
+                    <a:p>
+                      <a:endParaRPr lang="en-US" dirty="0"/>
+                    </a:p>
+                  </a:txBody>
+                  <a:tcPr>
+                    <a:solidFill>
+                      <a:schemeClr val="bg1">
+                        <a:lumMod val="50000"/>
+                      </a:schemeClr>
+                    </a:solidFill>
+                  </a:tcPr>
+                </a:tc>
+                <a:extLst>
+                  <a:ext uri="{0D108BD9-81ED-4DB2-BD59-A6C34878D82A}">
+                    <a16:rowId xmlns:a16="http://schemas.microsoft.com/office/drawing/2014/main" val="2121185516"/>
+                  </a:ext>
+                </a:extLst>
+              </a:tr>
+              <a:tr h="370840">
+                <a:tc>
+                  <a:txBody>
+                    <a:bodyPr/>
+                    <a:lstStyle/>
+                    <a:p>
+                      <a:r>
+                        <a:rPr lang="en-US" sz="1800" b="1" kern="1200" dirty="0">
+                          <a:solidFill>
+                            <a:schemeClr val="lt1"/>
+                          </a:solidFill>
+                          <a:latin typeface="+mn-lt"/>
+                          <a:ea typeface="+mn-ea"/>
+                          <a:cs typeface="+mn-cs"/>
+                        </a:rPr>
+                        <a:t>c</a:t>
+                      </a:r>
+                    </a:p>
+                  </a:txBody>
+                  <a:tcPr>
+                    <a:solidFill>
+                      <a:schemeClr val="accent1"/>
+                    </a:solidFill>
+                  </a:tcPr>
+                </a:tc>
+                <a:tc>
+                  <a:txBody>
+                    <a:bodyPr/>
+                    <a:lstStyle/>
+                    <a:p>
+                      <a:r>
+                        <a:rPr lang="en-US" dirty="0"/>
+                        <a:t>1</a:t>
+                      </a:r>
+                    </a:p>
+                  </a:txBody>
+                  <a:tcPr/>
+                </a:tc>
+                <a:tc>
+                  <a:txBody>
+                    <a:bodyPr/>
+                    <a:lstStyle/>
+                    <a:p>
+                      <a:r>
+                        <a:rPr lang="en-US" dirty="0"/>
+                        <a:t>1</a:t>
+                      </a:r>
+                    </a:p>
+                  </a:txBody>
+                  <a:tcPr/>
+                </a:tc>
+                <a:tc>
+                  <a:txBody>
+                    <a:bodyPr/>
+                    <a:lstStyle/>
+                    <a:p>
+                      <a:r>
+                        <a:rPr lang="en-US" dirty="0"/>
+                        <a:t>1</a:t>
+                      </a:r>
+                    </a:p>
+                  </a:txBody>
+                  <a:tcPr/>
+                </a:tc>
+                <a:tc>
+                  <a:txBody>
+                    <a:bodyPr/>
+                    <a:lstStyle/>
+                    <a:p>
+                      <a:r>
+                        <a:rPr lang="en-US" dirty="0">
+                          <a:solidFill>
+                            <a:srgbClr val="FF0000"/>
+                          </a:solidFill>
+                        </a:rPr>
+                        <a:t>1</a:t>
+                      </a:r>
+                    </a:p>
+                  </a:txBody>
+                  <a:tcPr/>
+                </a:tc>
+                <a:tc>
+                  <a:txBody>
+                    <a:bodyPr/>
+                    <a:lstStyle/>
+                    <a:p>
+                      <a:r>
+                        <a:rPr lang="en-US" dirty="0">
+                          <a:solidFill>
+                            <a:srgbClr val="FF0000"/>
+                          </a:solidFill>
+                        </a:rPr>
+                        <a:t>1</a:t>
+                      </a:r>
+                    </a:p>
+                  </a:txBody>
+                  <a:tcPr/>
+                </a:tc>
+                <a:tc>
+                  <a:txBody>
+                    <a:bodyPr/>
+                    <a:lstStyle/>
+                    <a:p>
+                      <a:r>
+                        <a:rPr lang="en-US" dirty="0"/>
+                        <a:t>0</a:t>
+                      </a:r>
+                    </a:p>
+                  </a:txBody>
+                  <a:tcPr/>
+                </a:tc>
+                <a:tc>
+                  <a:txBody>
+                    <a:bodyPr/>
+                    <a:lstStyle/>
+                    <a:p>
+                      <a:endParaRPr lang="en-US" dirty="0"/>
+                    </a:p>
+                  </a:txBody>
+                  <a:tcPr>
+                    <a:solidFill>
+                      <a:schemeClr val="bg1">
+                        <a:lumMod val="50000"/>
+                      </a:schemeClr>
+                    </a:solidFill>
+                  </a:tcPr>
+                </a:tc>
+                <a:extLst>
+                  <a:ext uri="{0D108BD9-81ED-4DB2-BD59-A6C34878D82A}">
+                    <a16:rowId xmlns:a16="http://schemas.microsoft.com/office/drawing/2014/main" val="1398674406"/>
+                  </a:ext>
+                </a:extLst>
+              </a:tr>
+              <a:tr h="370840">
+                <a:tc>
+                  <a:txBody>
+                    <a:bodyPr/>
+                    <a:lstStyle/>
+                    <a:p>
+                      <a:endParaRPr lang="en-US" sz="1800" b="1" kern="1200" dirty="0">
+                        <a:solidFill>
+                          <a:schemeClr val="lt1"/>
+                        </a:solidFill>
+                        <a:latin typeface="+mn-lt"/>
+                        <a:ea typeface="+mn-ea"/>
+                        <a:cs typeface="+mn-cs"/>
+                      </a:endParaRPr>
+                    </a:p>
+                  </a:txBody>
+                  <a:tcPr>
+                    <a:solidFill>
+                      <a:schemeClr val="accent1"/>
+                    </a:solidFill>
+                  </a:tcPr>
+                </a:tc>
+                <a:tc>
+                  <a:txBody>
+                    <a:bodyPr/>
+                    <a:lstStyle/>
+                    <a:p>
+                      <a:r>
+                        <a:rPr lang="en-US" dirty="0"/>
+                        <a:t>0</a:t>
+                      </a:r>
+                    </a:p>
+                  </a:txBody>
+                  <a:tcPr>
+                    <a:solidFill>
+                      <a:schemeClr val="bg1">
+                        <a:lumMod val="50000"/>
+                      </a:schemeClr>
+                    </a:solidFill>
+                  </a:tcPr>
+                </a:tc>
+                <a:tc>
+                  <a:txBody>
+                    <a:bodyPr/>
+                    <a:lstStyle/>
+                    <a:p>
+                      <a:r>
+                        <a:rPr lang="en-US" dirty="0"/>
+                        <a:t>0</a:t>
+                      </a:r>
+                    </a:p>
+                  </a:txBody>
+                  <a:tcPr>
+                    <a:solidFill>
+                      <a:schemeClr val="bg1">
+                        <a:lumMod val="50000"/>
+                      </a:schemeClr>
+                    </a:solidFill>
+                  </a:tcPr>
+                </a:tc>
+                <a:tc>
+                  <a:txBody>
+                    <a:bodyPr/>
+                    <a:lstStyle/>
+                    <a:p>
+                      <a:r>
+                        <a:rPr lang="en-US" dirty="0"/>
+                        <a:t>0</a:t>
+                      </a:r>
+                    </a:p>
+                  </a:txBody>
+                  <a:tcPr>
+                    <a:solidFill>
+                      <a:schemeClr val="bg1">
+                        <a:lumMod val="50000"/>
+                      </a:schemeClr>
+                    </a:solidFill>
+                  </a:tcPr>
+                </a:tc>
+                <a:tc>
+                  <a:txBody>
+                    <a:bodyPr/>
+                    <a:lstStyle/>
+                    <a:p>
+                      <a:r>
+                        <a:rPr lang="en-US" dirty="0"/>
+                        <a:t>0</a:t>
+                      </a:r>
+                    </a:p>
+                  </a:txBody>
+                  <a:tcPr>
+                    <a:solidFill>
+                      <a:schemeClr val="bg1">
+                        <a:lumMod val="50000"/>
+                      </a:schemeClr>
+                    </a:solidFill>
+                  </a:tcPr>
+                </a:tc>
+                <a:tc>
+                  <a:txBody>
+                    <a:bodyPr/>
+                    <a:lstStyle/>
+                    <a:p>
+                      <a:r>
+                        <a:rPr lang="en-US" dirty="0"/>
+                        <a:t>0</a:t>
+                      </a:r>
+                    </a:p>
+                  </a:txBody>
+                  <a:tcPr>
+                    <a:solidFill>
+                      <a:schemeClr val="bg1">
+                        <a:lumMod val="50000"/>
+                      </a:schemeClr>
+                    </a:solidFill>
+                  </a:tcPr>
+                </a:tc>
+                <a:tc>
+                  <a:txBody>
+                    <a:bodyPr/>
+                    <a:lstStyle/>
+                    <a:p>
+                      <a:r>
+                        <a:rPr lang="en-US" dirty="0"/>
+                        <a:t>0</a:t>
+                      </a:r>
+                    </a:p>
+                  </a:txBody>
+                  <a:tcPr>
+                    <a:solidFill>
+                      <a:schemeClr val="bg1">
+                        <a:lumMod val="50000"/>
+                      </a:schemeClr>
+                    </a:solidFill>
+                  </a:tcPr>
+                </a:tc>
+                <a:tc>
+                  <a:txBody>
+                    <a:bodyPr/>
+                    <a:lstStyle/>
+                    <a:p>
+                      <a:endParaRPr lang="en-US" dirty="0"/>
+                    </a:p>
+                  </a:txBody>
+                  <a:tcPr>
+                    <a:solidFill>
+                      <a:schemeClr val="bg1">
+                        <a:lumMod val="50000"/>
+                      </a:schemeClr>
+                    </a:solidFill>
+                  </a:tcPr>
+                </a:tc>
+                <a:extLst>
+                  <a:ext uri="{0D108BD9-81ED-4DB2-BD59-A6C34878D82A}">
+                    <a16:rowId xmlns:a16="http://schemas.microsoft.com/office/drawing/2014/main" val="741044967"/>
+                  </a:ext>
+                </a:extLst>
+              </a:tr>
+              <a:tr h="370840">
+                <a:tc>
+                  <a:txBody>
+                    <a:bodyPr/>
+                    <a:lstStyle/>
+                    <a:p>
+                      <a:endParaRPr lang="en-US" sz="1800" b="1" kern="1200" dirty="0">
+                        <a:solidFill>
+                          <a:schemeClr val="lt1"/>
+                        </a:solidFill>
+                        <a:latin typeface="+mn-lt"/>
+                        <a:ea typeface="+mn-ea"/>
+                        <a:cs typeface="+mn-cs"/>
+                      </a:endParaRPr>
+                    </a:p>
+                  </a:txBody>
+                  <a:tcPr>
+                    <a:solidFill>
+                      <a:schemeClr val="accent1"/>
+                    </a:solidFill>
+                  </a:tcPr>
+                </a:tc>
+                <a:tc>
+                  <a:txBody>
+                    <a:bodyPr/>
+                    <a:lstStyle/>
+                    <a:p>
+                      <a:endParaRPr lang="en-US" dirty="0"/>
+                    </a:p>
+                  </a:txBody>
+                  <a:tcPr/>
+                </a:tc>
+                <a:tc>
+                  <a:txBody>
+                    <a:bodyPr/>
+                    <a:lstStyle/>
+                    <a:p>
+                      <a:endParaRPr lang="en-US" dirty="0"/>
+                    </a:p>
+                  </a:txBody>
+                  <a:tcPr/>
+                </a:tc>
+                <a:tc>
+                  <a:txBody>
+                    <a:bodyPr/>
+                    <a:lstStyle/>
+                    <a:p>
+                      <a:endParaRPr lang="en-US" dirty="0"/>
+                    </a:p>
+                  </a:txBody>
+                  <a:tcPr/>
+                </a:tc>
+                <a:tc>
+                  <a:txBody>
+                    <a:bodyPr/>
+                    <a:lstStyle/>
+                    <a:p>
+                      <a:endParaRPr lang="en-US" dirty="0"/>
+                    </a:p>
+                  </a:txBody>
+                  <a:tcPr/>
+                </a:tc>
+                <a:tc>
+                  <a:txBody>
+                    <a:bodyPr/>
+                    <a:lstStyle/>
+                    <a:p>
+                      <a:endParaRPr lang="en-US" dirty="0"/>
+                    </a:p>
+                  </a:txBody>
+                  <a:tcPr/>
+                </a:tc>
+                <a:tc>
+                  <a:txBody>
+                    <a:bodyPr/>
+                    <a:lstStyle/>
+                    <a:p>
+                      <a:endParaRPr lang="en-US" dirty="0"/>
+                    </a:p>
+                  </a:txBody>
+                  <a:tcPr/>
+                </a:tc>
+                <a:tc>
+                  <a:txBody>
+                    <a:bodyPr/>
+                    <a:lstStyle/>
+                    <a:p>
+                      <a:endParaRPr lang="en-US" dirty="0"/>
+                    </a:p>
+                  </a:txBody>
+                  <a:tcPr>
+                    <a:solidFill>
+                      <a:schemeClr val="bg1">
+                        <a:lumMod val="50000"/>
+                      </a:schemeClr>
+                    </a:solidFill>
+                  </a:tcPr>
+                </a:tc>
+                <a:extLst>
+                  <a:ext uri="{0D108BD9-81ED-4DB2-BD59-A6C34878D82A}">
+                    <a16:rowId xmlns:a16="http://schemas.microsoft.com/office/drawing/2014/main" val="1254206590"/>
+                  </a:ext>
+                </a:extLst>
+              </a:tr>
+              <a:tr h="370840">
+                <a:tc>
+                  <a:txBody>
+                    <a:bodyPr/>
+                    <a:lstStyle/>
+                    <a:p>
+                      <a:endParaRPr lang="en-US" sz="1800" b="1" kern="1200" dirty="0">
+                        <a:solidFill>
+                          <a:schemeClr val="lt1"/>
+                        </a:solidFill>
+                        <a:latin typeface="+mn-lt"/>
+                        <a:ea typeface="+mn-ea"/>
+                        <a:cs typeface="+mn-cs"/>
+                      </a:endParaRPr>
+                    </a:p>
+                  </a:txBody>
+                  <a:tcPr>
+                    <a:solidFill>
+                      <a:schemeClr val="accent1"/>
+                    </a:solidFill>
+                  </a:tcPr>
+                </a:tc>
+                <a:tc>
+                  <a:txBody>
+                    <a:bodyPr/>
+                    <a:lstStyle/>
+                    <a:p>
+                      <a:endParaRPr lang="en-US" dirty="0"/>
+                    </a:p>
+                  </a:txBody>
+                  <a:tcPr/>
+                </a:tc>
+                <a:tc>
+                  <a:txBody>
+                    <a:bodyPr/>
+                    <a:lstStyle/>
+                    <a:p>
+                      <a:endParaRPr lang="en-US" dirty="0"/>
+                    </a:p>
+                  </a:txBody>
+                  <a:tcPr/>
+                </a:tc>
+                <a:tc>
+                  <a:txBody>
+                    <a:bodyPr/>
+                    <a:lstStyle/>
+                    <a:p>
+                      <a:endParaRPr lang="en-US" dirty="0"/>
+                    </a:p>
+                  </a:txBody>
+                  <a:tcPr/>
+                </a:tc>
+                <a:tc>
+                  <a:txBody>
+                    <a:bodyPr/>
+                    <a:lstStyle/>
+                    <a:p>
+                      <a:endParaRPr lang="en-US" dirty="0"/>
+                    </a:p>
+                  </a:txBody>
+                  <a:tcPr/>
+                </a:tc>
+                <a:tc>
+                  <a:txBody>
+                    <a:bodyPr/>
+                    <a:lstStyle/>
+                    <a:p>
+                      <a:endParaRPr lang="en-US" dirty="0"/>
+                    </a:p>
+                  </a:txBody>
+                  <a:tcPr/>
+                </a:tc>
+                <a:tc>
+                  <a:txBody>
+                    <a:bodyPr/>
+                    <a:lstStyle/>
+                    <a:p>
+                      <a:endParaRPr lang="en-US" dirty="0"/>
+                    </a:p>
+                  </a:txBody>
+                  <a:tcPr/>
+                </a:tc>
+                <a:tc>
+                  <a:txBody>
+                    <a:bodyPr/>
+                    <a:lstStyle/>
+                    <a:p>
+                      <a:endParaRPr lang="en-US" dirty="0"/>
+                    </a:p>
+                  </a:txBody>
+                  <a:tcPr>
+                    <a:solidFill>
+                      <a:schemeClr val="bg1">
+                        <a:lumMod val="50000"/>
+                      </a:schemeClr>
+                    </a:solidFill>
+                  </a:tcPr>
+                </a:tc>
+                <a:extLst>
+                  <a:ext uri="{0D108BD9-81ED-4DB2-BD59-A6C34878D82A}">
+                    <a16:rowId xmlns:a16="http://schemas.microsoft.com/office/drawing/2014/main" val="2572115340"/>
+                  </a:ext>
+                </a:extLst>
+              </a:tr>
+              <a:tr h="370840">
+                <a:tc>
+                  <a:txBody>
+                    <a:bodyPr/>
+                    <a:lstStyle/>
+                    <a:p>
+                      <a:endParaRPr lang="en-US" sz="1800" b="1" kern="1200" dirty="0">
+                        <a:solidFill>
+                          <a:schemeClr val="lt1"/>
+                        </a:solidFill>
+                        <a:latin typeface="+mn-lt"/>
+                        <a:ea typeface="+mn-ea"/>
+                        <a:cs typeface="+mn-cs"/>
+                      </a:endParaRPr>
+                    </a:p>
+                  </a:txBody>
+                  <a:tcPr>
+                    <a:solidFill>
+                      <a:schemeClr val="accent1"/>
+                    </a:solidFill>
+                  </a:tcPr>
+                </a:tc>
+                <a:tc>
+                  <a:txBody>
+                    <a:bodyPr/>
+                    <a:lstStyle/>
+                    <a:p>
+                      <a:endParaRPr lang="en-US" dirty="0"/>
+                    </a:p>
+                  </a:txBody>
+                  <a:tcPr/>
+                </a:tc>
+                <a:tc>
+                  <a:txBody>
+                    <a:bodyPr/>
+                    <a:lstStyle/>
+                    <a:p>
+                      <a:endParaRPr lang="en-US" dirty="0"/>
+                    </a:p>
+                  </a:txBody>
+                  <a:tcPr/>
+                </a:tc>
+                <a:tc>
+                  <a:txBody>
+                    <a:bodyPr/>
+                    <a:lstStyle/>
+                    <a:p>
+                      <a:endParaRPr lang="en-US" dirty="0"/>
+                    </a:p>
+                  </a:txBody>
+                  <a:tcPr/>
+                </a:tc>
+                <a:tc>
+                  <a:txBody>
+                    <a:bodyPr/>
+                    <a:lstStyle/>
+                    <a:p>
+                      <a:endParaRPr lang="en-US" dirty="0"/>
+                    </a:p>
+                  </a:txBody>
+                  <a:tcPr/>
+                </a:tc>
+                <a:tc>
+                  <a:txBody>
+                    <a:bodyPr/>
+                    <a:lstStyle/>
+                    <a:p>
+                      <a:endParaRPr lang="en-US" dirty="0"/>
+                    </a:p>
+                  </a:txBody>
+                  <a:tcPr/>
+                </a:tc>
+                <a:tc>
+                  <a:txBody>
+                    <a:bodyPr/>
+                    <a:lstStyle/>
+                    <a:p>
+                      <a:endParaRPr lang="en-US" dirty="0"/>
+                    </a:p>
+                  </a:txBody>
+                  <a:tcPr/>
+                </a:tc>
+                <a:tc>
+                  <a:txBody>
+                    <a:bodyPr/>
+                    <a:lstStyle/>
+                    <a:p>
+                      <a:endParaRPr lang="en-US" dirty="0"/>
+                    </a:p>
+                  </a:txBody>
+                  <a:tcPr>
+                    <a:solidFill>
+                      <a:schemeClr val="bg1">
+                        <a:lumMod val="50000"/>
+                      </a:schemeClr>
+                    </a:solidFill>
+                  </a:tcPr>
+                </a:tc>
+                <a:extLst>
+                  <a:ext uri="{0D108BD9-81ED-4DB2-BD59-A6C34878D82A}">
+                    <a16:rowId xmlns:a16="http://schemas.microsoft.com/office/drawing/2014/main" val="386262810"/>
+                  </a:ext>
+                </a:extLst>
+              </a:tr>
+              <a:tr h="370840">
+                <a:tc>
+                  <a:txBody>
+                    <a:bodyPr/>
+                    <a:lstStyle/>
+                    <a:p>
+                      <a:endParaRPr lang="en-US" sz="1800" b="1" kern="1200" dirty="0">
+                        <a:solidFill>
+                          <a:schemeClr val="lt1"/>
+                        </a:solidFill>
+                        <a:latin typeface="+mn-lt"/>
+                        <a:ea typeface="+mn-ea"/>
+                        <a:cs typeface="+mn-cs"/>
+                      </a:endParaRPr>
+                    </a:p>
+                  </a:txBody>
+                  <a:tcPr>
+                    <a:solidFill>
+                      <a:schemeClr val="bg1">
+                        <a:lumMod val="50000"/>
+                      </a:schemeClr>
+                    </a:solidFill>
+                  </a:tcPr>
+                </a:tc>
+                <a:tc>
+                  <a:txBody>
+                    <a:bodyPr/>
+                    <a:lstStyle/>
+                    <a:p>
+                      <a:endParaRPr lang="en-US" dirty="0"/>
+                    </a:p>
+                  </a:txBody>
+                  <a:tcPr>
+                    <a:solidFill>
+                      <a:schemeClr val="bg1">
+                        <a:lumMod val="50000"/>
+                      </a:schemeClr>
+                    </a:solidFill>
+                  </a:tcPr>
+                </a:tc>
+                <a:tc>
+                  <a:txBody>
+                    <a:bodyPr/>
+                    <a:lstStyle/>
+                    <a:p>
+                      <a:endParaRPr lang="en-US" dirty="0"/>
+                    </a:p>
+                  </a:txBody>
+                  <a:tcPr>
+                    <a:solidFill>
+                      <a:schemeClr val="bg1">
+                        <a:lumMod val="50000"/>
+                      </a:schemeClr>
+                    </a:solidFill>
+                  </a:tcPr>
+                </a:tc>
+                <a:tc>
+                  <a:txBody>
+                    <a:bodyPr/>
+                    <a:lstStyle/>
+                    <a:p>
+                      <a:endParaRPr lang="en-US" dirty="0"/>
+                    </a:p>
+                  </a:txBody>
+                  <a:tcPr>
+                    <a:solidFill>
+                      <a:schemeClr val="bg1">
+                        <a:lumMod val="50000"/>
+                      </a:schemeClr>
+                    </a:solidFill>
+                  </a:tcPr>
+                </a:tc>
+                <a:tc>
+                  <a:txBody>
+                    <a:bodyPr/>
+                    <a:lstStyle/>
+                    <a:p>
+                      <a:endParaRPr lang="en-US" dirty="0"/>
+                    </a:p>
+                  </a:txBody>
+                  <a:tcPr>
+                    <a:solidFill>
+                      <a:schemeClr val="bg1">
+                        <a:lumMod val="50000"/>
+                      </a:schemeClr>
+                    </a:solidFill>
+                  </a:tcPr>
+                </a:tc>
+                <a:tc>
+                  <a:txBody>
+                    <a:bodyPr/>
+                    <a:lstStyle/>
+                    <a:p>
+                      <a:endParaRPr lang="en-US" dirty="0"/>
+                    </a:p>
+                  </a:txBody>
+                  <a:tcPr>
+                    <a:solidFill>
+                      <a:schemeClr val="bg1">
+                        <a:lumMod val="50000"/>
+                      </a:schemeClr>
+                    </a:solidFill>
+                  </a:tcPr>
+                </a:tc>
+                <a:tc>
+                  <a:txBody>
+                    <a:bodyPr/>
+                    <a:lstStyle/>
+                    <a:p>
+                      <a:endParaRPr lang="en-US" dirty="0"/>
+                    </a:p>
+                  </a:txBody>
+                  <a:tcPr>
+                    <a:solidFill>
+                      <a:schemeClr val="bg1">
+                        <a:lumMod val="50000"/>
+                      </a:schemeClr>
+                    </a:solidFill>
+                  </a:tcPr>
+                </a:tc>
+                <a:tc>
+                  <a:txBody>
+                    <a:bodyPr/>
+                    <a:lstStyle/>
+                    <a:p>
+                      <a:endParaRPr lang="en-US" dirty="0"/>
+                    </a:p>
+                  </a:txBody>
+                  <a:tcPr>
+                    <a:solidFill>
+                      <a:schemeClr val="bg1">
+                        <a:lumMod val="50000"/>
+                      </a:schemeClr>
+                    </a:solidFill>
+                  </a:tcPr>
+                </a:tc>
+                <a:extLst>
+                  <a:ext uri="{0D108BD9-81ED-4DB2-BD59-A6C34878D82A}">
+                    <a16:rowId xmlns:a16="http://schemas.microsoft.com/office/drawing/2014/main" val="4054548687"/>
+                  </a:ext>
+                </a:extLst>
+              </a:tr>
+            </a:tbl>
+          </a:graphicData>
+        </a:graphic>
+      </p:graphicFrame>
+      <p:sp>
+        <p:nvSpPr>
+          <p:cNvPr id="7" name="TextBox 6">
+            <a:extLst>
+              <a:ext uri="{FF2B5EF4-FFF2-40B4-BE49-F238E27FC236}">
+                <a16:creationId xmlns:a16="http://schemas.microsoft.com/office/drawing/2014/main" id="{A67D9083-B1E3-D0AB-D0E4-D6D7440E2B80}"/>
+              </a:ext>
+            </a:extLst>
+          </p:cNvPr>
+          <p:cNvSpPr txBox="1"/>
+          <p:nvPr/>
+        </p:nvSpPr>
+        <p:spPr>
+          <a:xfrm>
+            <a:off x="1502229" y="1077686"/>
+            <a:ext cx="476412" cy="369332"/>
+          </a:xfrm>
+          <a:prstGeom prst="rect">
+            <a:avLst/>
+          </a:prstGeom>
+          <a:noFill/>
+        </p:spPr>
+        <p:txBody>
+          <a:bodyPr wrap="none" rtlCol="0">
+            <a:spAutoFit/>
+          </a:bodyPr>
+          <a:lstStyle/>
+          <a:p>
+            <a:r>
+              <a:rPr lang="en-US" dirty="0"/>
+              <a:t>DP</a:t>
+            </a:r>
+          </a:p>
+        </p:txBody>
+      </p:sp>
+      <p:graphicFrame>
+        <p:nvGraphicFramePr>
+          <p:cNvPr id="8" name="Table 7">
+            <a:extLst>
+              <a:ext uri="{FF2B5EF4-FFF2-40B4-BE49-F238E27FC236}">
+                <a16:creationId xmlns:a16="http://schemas.microsoft.com/office/drawing/2014/main" id="{CA6C9607-0BD9-EF2B-A870-0A4200100856}"/>
+              </a:ext>
+            </a:extLst>
+          </p:cNvPr>
+          <p:cNvGraphicFramePr>
+            <a:graphicFrameLocks noGrp="1"/>
+          </p:cNvGraphicFramePr>
+          <p:nvPr/>
+        </p:nvGraphicFramePr>
+        <p:xfrm>
+          <a:off x="4413250" y="1601409"/>
+          <a:ext cx="2686960" cy="3337560"/>
+        </p:xfrm>
+        <a:graphic>
+          <a:graphicData uri="http://schemas.openxmlformats.org/drawingml/2006/table">
+            <a:tbl>
+              <a:tblPr firstRow="1" bandRow="1">
+                <a:tableStyleId>{5C22544A-7EE6-4342-B048-85BDC9FD1C3A}</a:tableStyleId>
+              </a:tblPr>
+              <a:tblGrid>
+                <a:gridCol w="335870">
+                  <a:extLst>
+                    <a:ext uri="{9D8B030D-6E8A-4147-A177-3AD203B41FA5}">
+                      <a16:colId xmlns:a16="http://schemas.microsoft.com/office/drawing/2014/main" val="4049008226"/>
+                    </a:ext>
+                  </a:extLst>
+                </a:gridCol>
+                <a:gridCol w="335870">
+                  <a:extLst>
+                    <a:ext uri="{9D8B030D-6E8A-4147-A177-3AD203B41FA5}">
+                      <a16:colId xmlns:a16="http://schemas.microsoft.com/office/drawing/2014/main" val="3478397847"/>
+                    </a:ext>
+                  </a:extLst>
+                </a:gridCol>
+                <a:gridCol w="335870">
+                  <a:extLst>
+                    <a:ext uri="{9D8B030D-6E8A-4147-A177-3AD203B41FA5}">
+                      <a16:colId xmlns:a16="http://schemas.microsoft.com/office/drawing/2014/main" val="3287294923"/>
+                    </a:ext>
+                  </a:extLst>
+                </a:gridCol>
+                <a:gridCol w="335870">
+                  <a:extLst>
+                    <a:ext uri="{9D8B030D-6E8A-4147-A177-3AD203B41FA5}">
+                      <a16:colId xmlns:a16="http://schemas.microsoft.com/office/drawing/2014/main" val="2977211747"/>
+                    </a:ext>
+                  </a:extLst>
+                </a:gridCol>
+                <a:gridCol w="335870">
+                  <a:extLst>
+                    <a:ext uri="{9D8B030D-6E8A-4147-A177-3AD203B41FA5}">
+                      <a16:colId xmlns:a16="http://schemas.microsoft.com/office/drawing/2014/main" val="3693455604"/>
+                    </a:ext>
+                  </a:extLst>
+                </a:gridCol>
+                <a:gridCol w="335870">
+                  <a:extLst>
+                    <a:ext uri="{9D8B030D-6E8A-4147-A177-3AD203B41FA5}">
+                      <a16:colId xmlns:a16="http://schemas.microsoft.com/office/drawing/2014/main" val="1044826715"/>
+                    </a:ext>
+                  </a:extLst>
+                </a:gridCol>
+                <a:gridCol w="335870">
+                  <a:extLst>
+                    <a:ext uri="{9D8B030D-6E8A-4147-A177-3AD203B41FA5}">
+                      <a16:colId xmlns:a16="http://schemas.microsoft.com/office/drawing/2014/main" val="1787000519"/>
+                    </a:ext>
+                  </a:extLst>
+                </a:gridCol>
+                <a:gridCol w="335870">
+                  <a:extLst>
+                    <a:ext uri="{9D8B030D-6E8A-4147-A177-3AD203B41FA5}">
+                      <a16:colId xmlns:a16="http://schemas.microsoft.com/office/drawing/2014/main" val="1257803747"/>
+                    </a:ext>
+                  </a:extLst>
+                </a:gridCol>
+              </a:tblGrid>
+              <a:tr h="370840">
+                <a:tc>
+                  <a:txBody>
+                    <a:bodyPr/>
+                    <a:lstStyle/>
+                    <a:p>
+                      <a:endParaRPr lang="en-US"/>
+                    </a:p>
+                  </a:txBody>
+                  <a:tcPr/>
+                </a:tc>
+                <a:tc>
+                  <a:txBody>
+                    <a:bodyPr/>
+                    <a:lstStyle/>
+                    <a:p>
+                      <a:r>
+                        <a:rPr lang="en-US" dirty="0"/>
+                        <a:t>a</a:t>
+                      </a:r>
+                    </a:p>
+                  </a:txBody>
+                  <a:tcPr/>
+                </a:tc>
+                <a:tc>
+                  <a:txBody>
+                    <a:bodyPr/>
+                    <a:lstStyle/>
+                    <a:p>
+                      <a:r>
+                        <a:rPr lang="en-US" dirty="0"/>
+                        <a:t>b</a:t>
+                      </a:r>
+                    </a:p>
+                  </a:txBody>
+                  <a:tcPr/>
+                </a:tc>
+                <a:tc>
+                  <a:txBody>
+                    <a:bodyPr/>
+                    <a:lstStyle/>
+                    <a:p>
+                      <a:r>
+                        <a:rPr lang="en-US" dirty="0"/>
+                        <a:t>c</a:t>
+                      </a:r>
+                    </a:p>
+                  </a:txBody>
+                  <a:tcPr/>
+                </a:tc>
+                <a:tc>
+                  <a:txBody>
+                    <a:bodyPr/>
+                    <a:lstStyle/>
+                    <a:p>
+                      <a:r>
+                        <a:rPr lang="en-US" dirty="0"/>
+                        <a:t>a</a:t>
+                      </a:r>
+                    </a:p>
+                  </a:txBody>
+                  <a:tcPr/>
+                </a:tc>
+                <a:tc>
+                  <a:txBody>
+                    <a:bodyPr/>
+                    <a:lstStyle/>
+                    <a:p>
+                      <a:r>
+                        <a:rPr lang="en-US" dirty="0"/>
+                        <a:t>b</a:t>
+                      </a:r>
+                    </a:p>
+                  </a:txBody>
+                  <a:tcPr/>
+                </a:tc>
+                <a:tc>
+                  <a:txBody>
+                    <a:bodyPr/>
+                    <a:lstStyle/>
+                    <a:p>
+                      <a:r>
+                        <a:rPr lang="en-US" dirty="0"/>
+                        <a:t>c</a:t>
+                      </a:r>
+                    </a:p>
+                  </a:txBody>
+                  <a:tcPr/>
+                </a:tc>
+                <a:tc>
+                  <a:txBody>
+                    <a:bodyPr/>
+                    <a:lstStyle/>
+                    <a:p>
+                      <a:endParaRPr lang="en-US" dirty="0"/>
+                    </a:p>
+                  </a:txBody>
+                  <a:tcPr>
+                    <a:solidFill>
+                      <a:schemeClr val="bg1">
+                        <a:lumMod val="50000"/>
+                      </a:schemeClr>
+                    </a:solidFill>
+                  </a:tcPr>
+                </a:tc>
+                <a:extLst>
+                  <a:ext uri="{0D108BD9-81ED-4DB2-BD59-A6C34878D82A}">
+                    <a16:rowId xmlns:a16="http://schemas.microsoft.com/office/drawing/2014/main" val="2410859909"/>
+                  </a:ext>
+                </a:extLst>
+              </a:tr>
+              <a:tr h="370840">
+                <a:tc>
+                  <a:txBody>
+                    <a:bodyPr/>
+                    <a:lstStyle/>
+                    <a:p>
+                      <a:pPr marL="0" algn="l" defTabSz="914400" rtl="0" eaLnBrk="1" latinLnBrk="0" hangingPunct="1"/>
+                      <a:r>
+                        <a:rPr lang="en-US" sz="1800" b="1" kern="1200" dirty="0">
+                          <a:solidFill>
+                            <a:schemeClr val="lt1"/>
+                          </a:solidFill>
+                          <a:latin typeface="+mn-lt"/>
+                          <a:ea typeface="+mn-ea"/>
+                          <a:cs typeface="+mn-cs"/>
+                        </a:rPr>
+                        <a:t>a</a:t>
+                      </a:r>
+                    </a:p>
+                  </a:txBody>
+                  <a:tcPr>
+                    <a:solidFill>
+                      <a:schemeClr val="accent1"/>
+                    </a:solidFill>
+                  </a:tcPr>
+                </a:tc>
+                <a:tc>
+                  <a:txBody>
+                    <a:bodyPr/>
+                    <a:lstStyle/>
+                    <a:p>
+                      <a:r>
+                        <a:rPr lang="en-US" b="1" dirty="0">
+                          <a:solidFill>
+                            <a:srgbClr val="FF0000"/>
+                          </a:solidFill>
+                        </a:rPr>
+                        <a:t>3</a:t>
+                      </a:r>
+                    </a:p>
+                  </a:txBody>
+                  <a:tcPr/>
+                </a:tc>
+                <a:tc>
+                  <a:txBody>
+                    <a:bodyPr/>
+                    <a:lstStyle/>
+                    <a:p>
+                      <a:r>
+                        <a:rPr lang="en-US" dirty="0"/>
+                        <a:t>3</a:t>
+                      </a:r>
+                    </a:p>
+                  </a:txBody>
+                  <a:tcPr/>
+                </a:tc>
+                <a:tc>
+                  <a:txBody>
+                    <a:bodyPr/>
+                    <a:lstStyle/>
+                    <a:p>
+                      <a:r>
+                        <a:rPr lang="en-US" dirty="0"/>
+                        <a:t>3</a:t>
+                      </a:r>
+                    </a:p>
+                  </a:txBody>
+                  <a:tcPr/>
+                </a:tc>
+                <a:tc>
+                  <a:txBody>
+                    <a:bodyPr/>
+                    <a:lstStyle/>
+                    <a:p>
+                      <a:r>
+                        <a:rPr lang="en-US" b="1" dirty="0">
+                          <a:solidFill>
+                            <a:srgbClr val="FF0000"/>
+                          </a:solidFill>
+                        </a:rPr>
+                        <a:t>3</a:t>
+                      </a:r>
+                    </a:p>
+                  </a:txBody>
+                  <a:tcPr/>
+                </a:tc>
+                <a:tc>
+                  <a:txBody>
+                    <a:bodyPr/>
+                    <a:lstStyle/>
+                    <a:p>
+                      <a:r>
+                        <a:rPr lang="en-US" dirty="0"/>
+                        <a:t>2</a:t>
+                      </a:r>
+                    </a:p>
+                  </a:txBody>
+                  <a:tcPr/>
+                </a:tc>
+                <a:tc>
+                  <a:txBody>
+                    <a:bodyPr/>
+                    <a:lstStyle/>
+                    <a:p>
+                      <a:r>
+                        <a:rPr lang="en-US" dirty="0"/>
+                        <a:t>1</a:t>
+                      </a:r>
+                    </a:p>
+                  </a:txBody>
+                  <a:tcPr/>
+                </a:tc>
+                <a:tc>
+                  <a:txBody>
+                    <a:bodyPr/>
+                    <a:lstStyle/>
+                    <a:p>
+                      <a:r>
+                        <a:rPr lang="en-US" dirty="0"/>
+                        <a:t>0</a:t>
+                      </a:r>
+                    </a:p>
+                  </a:txBody>
+                  <a:tcPr>
+                    <a:solidFill>
+                      <a:schemeClr val="bg1">
+                        <a:lumMod val="50000"/>
+                      </a:schemeClr>
+                    </a:solidFill>
+                  </a:tcPr>
+                </a:tc>
+                <a:extLst>
+                  <a:ext uri="{0D108BD9-81ED-4DB2-BD59-A6C34878D82A}">
+                    <a16:rowId xmlns:a16="http://schemas.microsoft.com/office/drawing/2014/main" val="2314656069"/>
+                  </a:ext>
+                </a:extLst>
+              </a:tr>
+              <a:tr h="370840">
+                <a:tc>
+                  <a:txBody>
+                    <a:bodyPr/>
+                    <a:lstStyle/>
+                    <a:p>
+                      <a:pPr marL="0" algn="l" defTabSz="914400" rtl="0" eaLnBrk="1" latinLnBrk="0" hangingPunct="1"/>
+                      <a:r>
+                        <a:rPr lang="en-US" sz="1800" b="1" kern="1200" dirty="0">
+                          <a:solidFill>
+                            <a:schemeClr val="lt1"/>
+                          </a:solidFill>
+                          <a:latin typeface="+mn-lt"/>
+                          <a:ea typeface="+mn-ea"/>
+                          <a:cs typeface="+mn-cs"/>
+                        </a:rPr>
+                        <a:t>b</a:t>
+                      </a:r>
+                    </a:p>
+                  </a:txBody>
+                  <a:tcPr>
+                    <a:solidFill>
+                      <a:schemeClr val="accent1"/>
+                    </a:solidFill>
+                  </a:tcPr>
+                </a:tc>
+                <a:tc>
+                  <a:txBody>
+                    <a:bodyPr/>
+                    <a:lstStyle/>
+                    <a:p>
+                      <a:r>
+                        <a:rPr lang="en-US" dirty="0"/>
+                        <a:t>2</a:t>
+                      </a:r>
+                    </a:p>
+                  </a:txBody>
+                  <a:tcPr/>
+                </a:tc>
+                <a:tc>
+                  <a:txBody>
+                    <a:bodyPr/>
+                    <a:lstStyle/>
+                    <a:p>
+                      <a:r>
+                        <a:rPr lang="en-US" dirty="0"/>
+                        <a:t>2</a:t>
+                      </a:r>
+                    </a:p>
+                  </a:txBody>
+                  <a:tcPr/>
+                </a:tc>
+                <a:tc>
+                  <a:txBody>
+                    <a:bodyPr/>
+                    <a:lstStyle/>
+                    <a:p>
+                      <a:r>
+                        <a:rPr lang="en-US" dirty="0"/>
+                        <a:t>2</a:t>
+                      </a:r>
+                    </a:p>
+                  </a:txBody>
+                  <a:tcPr/>
+                </a:tc>
+                <a:tc>
+                  <a:txBody>
+                    <a:bodyPr/>
+                    <a:lstStyle/>
+                    <a:p>
+                      <a:r>
+                        <a:rPr lang="en-US" dirty="0"/>
+                        <a:t>2</a:t>
+                      </a:r>
+                    </a:p>
+                  </a:txBody>
+                  <a:tcPr/>
+                </a:tc>
+                <a:tc>
+                  <a:txBody>
+                    <a:bodyPr/>
+                    <a:lstStyle/>
+                    <a:p>
+                      <a:r>
+                        <a:rPr lang="en-US" dirty="0"/>
+                        <a:t>2</a:t>
+                      </a:r>
+                    </a:p>
+                  </a:txBody>
+                  <a:tcPr/>
+                </a:tc>
+                <a:tc>
+                  <a:txBody>
+                    <a:bodyPr/>
+                    <a:lstStyle/>
+                    <a:p>
+                      <a:r>
+                        <a:rPr lang="en-US" dirty="0"/>
+                        <a:t>1</a:t>
+                      </a:r>
+                    </a:p>
+                  </a:txBody>
+                  <a:tcPr/>
+                </a:tc>
+                <a:tc>
+                  <a:txBody>
+                    <a:bodyPr/>
+                    <a:lstStyle/>
+                    <a:p>
+                      <a:r>
+                        <a:rPr lang="en-US" dirty="0"/>
+                        <a:t>0</a:t>
+                      </a:r>
+                    </a:p>
+                  </a:txBody>
+                  <a:tcPr>
+                    <a:solidFill>
+                      <a:schemeClr val="bg1">
+                        <a:lumMod val="50000"/>
+                      </a:schemeClr>
+                    </a:solidFill>
+                  </a:tcPr>
+                </a:tc>
+                <a:extLst>
+                  <a:ext uri="{0D108BD9-81ED-4DB2-BD59-A6C34878D82A}">
+                    <a16:rowId xmlns:a16="http://schemas.microsoft.com/office/drawing/2014/main" val="2121185516"/>
+                  </a:ext>
+                </a:extLst>
+              </a:tr>
+              <a:tr h="370840">
+                <a:tc>
+                  <a:txBody>
+                    <a:bodyPr/>
+                    <a:lstStyle/>
+                    <a:p>
+                      <a:pPr marL="0" algn="l" defTabSz="914400" rtl="0" eaLnBrk="1" latinLnBrk="0" hangingPunct="1"/>
+                      <a:r>
+                        <a:rPr lang="en-US" sz="1800" b="1" kern="1200" dirty="0">
+                          <a:solidFill>
+                            <a:schemeClr val="lt1"/>
+                          </a:solidFill>
+                          <a:latin typeface="+mn-lt"/>
+                          <a:ea typeface="+mn-ea"/>
+                          <a:cs typeface="+mn-cs"/>
+                        </a:rPr>
+                        <a:t>c</a:t>
+                      </a:r>
+                    </a:p>
+                  </a:txBody>
+                  <a:tcPr>
+                    <a:solidFill>
+                      <a:schemeClr val="accent1"/>
+                    </a:solidFill>
+                  </a:tcPr>
+                </a:tc>
+                <a:tc>
+                  <a:txBody>
+                    <a:bodyPr/>
+                    <a:lstStyle/>
+                    <a:p>
+                      <a:r>
+                        <a:rPr lang="en-US" dirty="0"/>
+                        <a:t>1</a:t>
+                      </a:r>
+                    </a:p>
+                  </a:txBody>
+                  <a:tcPr/>
+                </a:tc>
+                <a:tc>
+                  <a:txBody>
+                    <a:bodyPr/>
+                    <a:lstStyle/>
+                    <a:p>
+                      <a:r>
+                        <a:rPr lang="en-US" dirty="0"/>
+                        <a:t>1</a:t>
+                      </a:r>
+                    </a:p>
+                  </a:txBody>
+                  <a:tcPr/>
+                </a:tc>
+                <a:tc>
+                  <a:txBody>
+                    <a:bodyPr/>
+                    <a:lstStyle/>
+                    <a:p>
+                      <a:r>
+                        <a:rPr lang="en-US" dirty="0"/>
+                        <a:t>1</a:t>
+                      </a:r>
+                    </a:p>
+                  </a:txBody>
+                  <a:tcPr/>
+                </a:tc>
+                <a:tc>
+                  <a:txBody>
+                    <a:bodyPr/>
+                    <a:lstStyle/>
+                    <a:p>
+                      <a:r>
+                        <a:rPr lang="en-US" dirty="0"/>
+                        <a:t>1</a:t>
+                      </a:r>
+                    </a:p>
+                  </a:txBody>
+                  <a:tcPr/>
+                </a:tc>
+                <a:tc>
+                  <a:txBody>
+                    <a:bodyPr/>
+                    <a:lstStyle/>
+                    <a:p>
+                      <a:r>
+                        <a:rPr lang="en-US" dirty="0"/>
+                        <a:t>1</a:t>
+                      </a:r>
+                    </a:p>
+                  </a:txBody>
+                  <a:tcPr/>
+                </a:tc>
+                <a:tc>
+                  <a:txBody>
+                    <a:bodyPr/>
+                    <a:lstStyle/>
+                    <a:p>
+                      <a:r>
+                        <a:rPr lang="en-US" dirty="0"/>
+                        <a:t>1</a:t>
+                      </a:r>
+                    </a:p>
+                  </a:txBody>
+                  <a:tcPr/>
+                </a:tc>
+                <a:tc>
+                  <a:txBody>
+                    <a:bodyPr/>
+                    <a:lstStyle/>
+                    <a:p>
+                      <a:r>
+                        <a:rPr lang="en-US" dirty="0"/>
+                        <a:t>0</a:t>
+                      </a:r>
+                    </a:p>
+                  </a:txBody>
+                  <a:tcPr>
+                    <a:solidFill>
+                      <a:schemeClr val="bg1">
+                        <a:lumMod val="50000"/>
+                      </a:schemeClr>
+                    </a:solidFill>
+                  </a:tcPr>
+                </a:tc>
+                <a:extLst>
+                  <a:ext uri="{0D108BD9-81ED-4DB2-BD59-A6C34878D82A}">
+                    <a16:rowId xmlns:a16="http://schemas.microsoft.com/office/drawing/2014/main" val="1398674406"/>
+                  </a:ext>
+                </a:extLst>
+              </a:tr>
+              <a:tr h="370840">
+                <a:tc>
+                  <a:txBody>
+                    <a:bodyPr/>
+                    <a:lstStyle/>
+                    <a:p>
+                      <a:pPr marL="0" algn="l" defTabSz="914400" rtl="0" eaLnBrk="1" latinLnBrk="0" hangingPunct="1"/>
+                      <a:endParaRPr lang="en-US" sz="1800" b="1" kern="1200" dirty="0">
+                        <a:solidFill>
+                          <a:schemeClr val="lt1"/>
+                        </a:solidFill>
+                        <a:latin typeface="+mn-lt"/>
+                        <a:ea typeface="+mn-ea"/>
+                        <a:cs typeface="+mn-cs"/>
+                      </a:endParaRPr>
+                    </a:p>
+                  </a:txBody>
+                  <a:tcPr>
+                    <a:solidFill>
+                      <a:schemeClr val="accent1"/>
+                    </a:solidFill>
+                  </a:tcPr>
+                </a:tc>
+                <a:tc>
+                  <a:txBody>
+                    <a:bodyPr/>
+                    <a:lstStyle/>
+                    <a:p>
+                      <a:r>
+                        <a:rPr lang="en-US" dirty="0"/>
+                        <a:t>0</a:t>
+                      </a:r>
+                    </a:p>
+                  </a:txBody>
+                  <a:tcPr>
+                    <a:solidFill>
+                      <a:schemeClr val="bg1">
+                        <a:lumMod val="50000"/>
+                      </a:schemeClr>
+                    </a:solidFill>
+                  </a:tcPr>
+                </a:tc>
+                <a:tc>
+                  <a:txBody>
+                    <a:bodyPr/>
+                    <a:lstStyle/>
+                    <a:p>
+                      <a:r>
+                        <a:rPr lang="en-US" dirty="0"/>
+                        <a:t>0</a:t>
+                      </a:r>
+                    </a:p>
+                  </a:txBody>
+                  <a:tcPr>
+                    <a:solidFill>
+                      <a:schemeClr val="bg1">
+                        <a:lumMod val="50000"/>
+                      </a:schemeClr>
+                    </a:solidFill>
+                  </a:tcPr>
+                </a:tc>
+                <a:tc>
+                  <a:txBody>
+                    <a:bodyPr/>
+                    <a:lstStyle/>
+                    <a:p>
+                      <a:r>
+                        <a:rPr lang="en-US" dirty="0"/>
+                        <a:t>0</a:t>
+                      </a:r>
+                    </a:p>
+                  </a:txBody>
+                  <a:tcPr>
+                    <a:solidFill>
+                      <a:schemeClr val="bg1">
+                        <a:lumMod val="50000"/>
+                      </a:schemeClr>
+                    </a:solidFill>
+                  </a:tcPr>
+                </a:tc>
+                <a:tc>
+                  <a:txBody>
+                    <a:bodyPr/>
+                    <a:lstStyle/>
+                    <a:p>
+                      <a:r>
+                        <a:rPr lang="en-US" dirty="0"/>
+                        <a:t>0</a:t>
+                      </a:r>
+                    </a:p>
+                  </a:txBody>
+                  <a:tcPr>
+                    <a:solidFill>
+                      <a:schemeClr val="bg1">
+                        <a:lumMod val="50000"/>
+                      </a:schemeClr>
+                    </a:solidFill>
+                  </a:tcPr>
+                </a:tc>
+                <a:tc>
+                  <a:txBody>
+                    <a:bodyPr/>
+                    <a:lstStyle/>
+                    <a:p>
+                      <a:r>
+                        <a:rPr lang="en-US" dirty="0"/>
+                        <a:t>0</a:t>
+                      </a:r>
+                    </a:p>
+                  </a:txBody>
+                  <a:tcPr>
+                    <a:solidFill>
+                      <a:schemeClr val="bg1">
+                        <a:lumMod val="50000"/>
+                      </a:schemeClr>
+                    </a:solidFill>
+                  </a:tcPr>
+                </a:tc>
+                <a:tc>
+                  <a:txBody>
+                    <a:bodyPr/>
+                    <a:lstStyle/>
+                    <a:p>
+                      <a:r>
+                        <a:rPr lang="en-US" dirty="0"/>
+                        <a:t>0</a:t>
+                      </a:r>
+                    </a:p>
+                  </a:txBody>
+                  <a:tcPr>
+                    <a:solidFill>
+                      <a:schemeClr val="bg1">
+                        <a:lumMod val="50000"/>
+                      </a:schemeClr>
+                    </a:solidFill>
+                  </a:tcPr>
+                </a:tc>
+                <a:tc>
+                  <a:txBody>
+                    <a:bodyPr/>
+                    <a:lstStyle/>
+                    <a:p>
+                      <a:r>
+                        <a:rPr lang="en-US" dirty="0"/>
+                        <a:t>0</a:t>
+                      </a:r>
+                    </a:p>
+                  </a:txBody>
+                  <a:tcPr>
+                    <a:solidFill>
+                      <a:schemeClr val="bg1">
+                        <a:lumMod val="50000"/>
+                      </a:schemeClr>
+                    </a:solidFill>
+                  </a:tcPr>
+                </a:tc>
+                <a:extLst>
+                  <a:ext uri="{0D108BD9-81ED-4DB2-BD59-A6C34878D82A}">
+                    <a16:rowId xmlns:a16="http://schemas.microsoft.com/office/drawing/2014/main" val="741044967"/>
+                  </a:ext>
+                </a:extLst>
+              </a:tr>
+              <a:tr h="370840">
+                <a:tc>
+                  <a:txBody>
+                    <a:bodyPr/>
+                    <a:lstStyle/>
+                    <a:p>
+                      <a:pPr marL="0" algn="l" defTabSz="914400" rtl="0" eaLnBrk="1" latinLnBrk="0" hangingPunct="1"/>
+                      <a:r>
+                        <a:rPr lang="en-US" sz="1800" b="1" kern="1200" dirty="0">
+                          <a:solidFill>
+                            <a:schemeClr val="lt1"/>
+                          </a:solidFill>
+                          <a:latin typeface="+mn-lt"/>
+                          <a:ea typeface="+mn-ea"/>
+                          <a:cs typeface="+mn-cs"/>
+                        </a:rPr>
+                        <a:t>a</a:t>
+                      </a:r>
+                    </a:p>
+                  </a:txBody>
+                  <a:tcPr>
+                    <a:solidFill>
+                      <a:schemeClr val="accent1"/>
+                    </a:solidFill>
+                  </a:tcPr>
+                </a:tc>
+                <a:tc>
+                  <a:txBody>
+                    <a:bodyPr/>
+                    <a:lstStyle/>
+                    <a:p>
+                      <a:r>
+                        <a:rPr lang="en-US" b="1" dirty="0">
+                          <a:solidFill>
+                            <a:srgbClr val="FF0000"/>
+                          </a:solidFill>
+                        </a:rPr>
+                        <a:t>3</a:t>
+                      </a:r>
+                    </a:p>
+                  </a:txBody>
+                  <a:tcPr/>
+                </a:tc>
+                <a:tc>
+                  <a:txBody>
+                    <a:bodyPr/>
+                    <a:lstStyle/>
+                    <a:p>
+                      <a:r>
+                        <a:rPr lang="en-US" dirty="0"/>
+                        <a:t>3</a:t>
+                      </a:r>
+                    </a:p>
+                  </a:txBody>
+                  <a:tcPr/>
+                </a:tc>
+                <a:tc>
+                  <a:txBody>
+                    <a:bodyPr/>
+                    <a:lstStyle/>
+                    <a:p>
+                      <a:r>
+                        <a:rPr lang="en-US" dirty="0"/>
+                        <a:t>3</a:t>
+                      </a:r>
+                    </a:p>
+                  </a:txBody>
+                  <a:tcPr/>
+                </a:tc>
+                <a:tc>
+                  <a:txBody>
+                    <a:bodyPr/>
+                    <a:lstStyle/>
+                    <a:p>
+                      <a:r>
+                        <a:rPr lang="en-US" b="1" dirty="0">
+                          <a:solidFill>
+                            <a:srgbClr val="FF0000"/>
+                          </a:solidFill>
+                        </a:rPr>
+                        <a:t>3</a:t>
+                      </a:r>
+                    </a:p>
+                  </a:txBody>
+                  <a:tcPr/>
+                </a:tc>
+                <a:tc>
+                  <a:txBody>
+                    <a:bodyPr/>
+                    <a:lstStyle/>
+                    <a:p>
+                      <a:r>
+                        <a:rPr lang="en-US" dirty="0"/>
+                        <a:t>2</a:t>
+                      </a:r>
+                    </a:p>
+                  </a:txBody>
+                  <a:tcPr/>
+                </a:tc>
+                <a:tc>
+                  <a:txBody>
+                    <a:bodyPr/>
+                    <a:lstStyle/>
+                    <a:p>
+                      <a:r>
+                        <a:rPr lang="en-US" dirty="0"/>
+                        <a:t>1</a:t>
+                      </a:r>
+                    </a:p>
+                  </a:txBody>
+                  <a:tcPr/>
+                </a:tc>
+                <a:tc>
+                  <a:txBody>
+                    <a:bodyPr/>
+                    <a:lstStyle/>
+                    <a:p>
+                      <a:r>
+                        <a:rPr lang="en-US" dirty="0"/>
+                        <a:t>0</a:t>
+                      </a:r>
+                    </a:p>
+                  </a:txBody>
+                  <a:tcPr>
+                    <a:solidFill>
+                      <a:schemeClr val="bg1">
+                        <a:lumMod val="50000"/>
+                      </a:schemeClr>
+                    </a:solidFill>
+                  </a:tcPr>
+                </a:tc>
+                <a:extLst>
+                  <a:ext uri="{0D108BD9-81ED-4DB2-BD59-A6C34878D82A}">
+                    <a16:rowId xmlns:a16="http://schemas.microsoft.com/office/drawing/2014/main" val="1254206590"/>
+                  </a:ext>
+                </a:extLst>
+              </a:tr>
+              <a:tr h="370840">
+                <a:tc>
+                  <a:txBody>
+                    <a:bodyPr/>
+                    <a:lstStyle/>
+                    <a:p>
+                      <a:pPr marL="0" algn="l" defTabSz="914400" rtl="0" eaLnBrk="1" latinLnBrk="0" hangingPunct="1"/>
+                      <a:r>
+                        <a:rPr lang="en-US" sz="1800" b="1" kern="1200" dirty="0">
+                          <a:solidFill>
+                            <a:schemeClr val="lt1"/>
+                          </a:solidFill>
+                          <a:latin typeface="+mn-lt"/>
+                          <a:ea typeface="+mn-ea"/>
+                          <a:cs typeface="+mn-cs"/>
+                        </a:rPr>
+                        <a:t>b</a:t>
+                      </a:r>
+                    </a:p>
+                  </a:txBody>
+                  <a:tcPr>
+                    <a:solidFill>
+                      <a:schemeClr val="accent1"/>
+                    </a:solidFill>
+                  </a:tcPr>
+                </a:tc>
+                <a:tc>
+                  <a:txBody>
+                    <a:bodyPr/>
+                    <a:lstStyle/>
+                    <a:p>
+                      <a:r>
+                        <a:rPr lang="en-US" dirty="0"/>
+                        <a:t>2</a:t>
+                      </a:r>
+                    </a:p>
+                  </a:txBody>
+                  <a:tcPr/>
+                </a:tc>
+                <a:tc>
+                  <a:txBody>
+                    <a:bodyPr/>
+                    <a:lstStyle/>
+                    <a:p>
+                      <a:r>
+                        <a:rPr lang="en-US" dirty="0"/>
+                        <a:t>2</a:t>
+                      </a:r>
+                    </a:p>
+                  </a:txBody>
+                  <a:tcPr/>
+                </a:tc>
+                <a:tc>
+                  <a:txBody>
+                    <a:bodyPr/>
+                    <a:lstStyle/>
+                    <a:p>
+                      <a:r>
+                        <a:rPr lang="en-US" dirty="0"/>
+                        <a:t>2</a:t>
+                      </a:r>
+                    </a:p>
+                  </a:txBody>
+                  <a:tcPr/>
+                </a:tc>
+                <a:tc>
+                  <a:txBody>
+                    <a:bodyPr/>
+                    <a:lstStyle/>
+                    <a:p>
+                      <a:r>
+                        <a:rPr lang="en-US" dirty="0"/>
+                        <a:t>2</a:t>
+                      </a:r>
+                    </a:p>
+                  </a:txBody>
+                  <a:tcPr/>
+                </a:tc>
+                <a:tc>
+                  <a:txBody>
+                    <a:bodyPr/>
+                    <a:lstStyle/>
+                    <a:p>
+                      <a:r>
+                        <a:rPr lang="en-US" dirty="0"/>
+                        <a:t>2</a:t>
+                      </a:r>
+                    </a:p>
+                  </a:txBody>
+                  <a:tcPr/>
+                </a:tc>
+                <a:tc>
+                  <a:txBody>
+                    <a:bodyPr/>
+                    <a:lstStyle/>
+                    <a:p>
+                      <a:r>
+                        <a:rPr lang="en-US" dirty="0"/>
+                        <a:t>1</a:t>
+                      </a:r>
+                    </a:p>
+                  </a:txBody>
+                  <a:tcPr/>
+                </a:tc>
+                <a:tc>
+                  <a:txBody>
+                    <a:bodyPr/>
+                    <a:lstStyle/>
+                    <a:p>
+                      <a:r>
+                        <a:rPr lang="en-US" dirty="0"/>
+                        <a:t>0</a:t>
+                      </a:r>
+                    </a:p>
+                  </a:txBody>
+                  <a:tcPr>
+                    <a:solidFill>
+                      <a:schemeClr val="bg1">
+                        <a:lumMod val="50000"/>
+                      </a:schemeClr>
+                    </a:solidFill>
+                  </a:tcPr>
+                </a:tc>
+                <a:extLst>
+                  <a:ext uri="{0D108BD9-81ED-4DB2-BD59-A6C34878D82A}">
+                    <a16:rowId xmlns:a16="http://schemas.microsoft.com/office/drawing/2014/main" val="2572115340"/>
+                  </a:ext>
+                </a:extLst>
+              </a:tr>
+              <a:tr h="370840">
+                <a:tc>
+                  <a:txBody>
+                    <a:bodyPr/>
+                    <a:lstStyle/>
+                    <a:p>
+                      <a:pPr marL="0" algn="l" defTabSz="914400" rtl="0" eaLnBrk="1" latinLnBrk="0" hangingPunct="1"/>
+                      <a:r>
+                        <a:rPr lang="en-US" sz="1800" b="1" kern="1200" dirty="0">
+                          <a:solidFill>
+                            <a:schemeClr val="lt1"/>
+                          </a:solidFill>
+                          <a:latin typeface="+mn-lt"/>
+                          <a:ea typeface="+mn-ea"/>
+                          <a:cs typeface="+mn-cs"/>
+                        </a:rPr>
+                        <a:t>c</a:t>
+                      </a:r>
+                    </a:p>
+                  </a:txBody>
+                  <a:tcPr>
+                    <a:solidFill>
+                      <a:schemeClr val="accent1"/>
+                    </a:solidFill>
+                  </a:tcPr>
+                </a:tc>
+                <a:tc>
+                  <a:txBody>
+                    <a:bodyPr/>
+                    <a:lstStyle/>
+                    <a:p>
+                      <a:r>
+                        <a:rPr lang="en-US" dirty="0"/>
+                        <a:t>1</a:t>
+                      </a:r>
+                    </a:p>
+                  </a:txBody>
+                  <a:tcPr/>
+                </a:tc>
+                <a:tc>
+                  <a:txBody>
+                    <a:bodyPr/>
+                    <a:lstStyle/>
+                    <a:p>
+                      <a:r>
+                        <a:rPr lang="en-US" dirty="0"/>
+                        <a:t>1</a:t>
+                      </a:r>
+                    </a:p>
+                  </a:txBody>
+                  <a:tcPr/>
+                </a:tc>
+                <a:tc>
+                  <a:txBody>
+                    <a:bodyPr/>
+                    <a:lstStyle/>
+                    <a:p>
+                      <a:r>
+                        <a:rPr lang="en-US" dirty="0"/>
+                        <a:t>1</a:t>
+                      </a:r>
+                    </a:p>
+                  </a:txBody>
+                  <a:tcPr/>
+                </a:tc>
+                <a:tc>
+                  <a:txBody>
+                    <a:bodyPr/>
+                    <a:lstStyle/>
+                    <a:p>
+                      <a:r>
+                        <a:rPr lang="en-US" dirty="0"/>
+                        <a:t>1</a:t>
+                      </a:r>
+                    </a:p>
+                  </a:txBody>
+                  <a:tcPr/>
+                </a:tc>
+                <a:tc>
+                  <a:txBody>
+                    <a:bodyPr/>
+                    <a:lstStyle/>
+                    <a:p>
+                      <a:r>
+                        <a:rPr lang="en-US" dirty="0"/>
+                        <a:t>1</a:t>
+                      </a:r>
+                    </a:p>
+                  </a:txBody>
+                  <a:tcPr/>
+                </a:tc>
+                <a:tc>
+                  <a:txBody>
+                    <a:bodyPr/>
+                    <a:lstStyle/>
+                    <a:p>
+                      <a:r>
+                        <a:rPr lang="en-US" dirty="0"/>
+                        <a:t>1</a:t>
+                      </a:r>
+                    </a:p>
+                  </a:txBody>
+                  <a:tcPr/>
+                </a:tc>
+                <a:tc>
+                  <a:txBody>
+                    <a:bodyPr/>
+                    <a:lstStyle/>
+                    <a:p>
+                      <a:r>
+                        <a:rPr lang="en-US" dirty="0"/>
+                        <a:t>0</a:t>
+                      </a:r>
+                    </a:p>
+                  </a:txBody>
+                  <a:tcPr>
+                    <a:solidFill>
+                      <a:schemeClr val="bg1">
+                        <a:lumMod val="50000"/>
+                      </a:schemeClr>
+                    </a:solidFill>
+                  </a:tcPr>
+                </a:tc>
+                <a:extLst>
+                  <a:ext uri="{0D108BD9-81ED-4DB2-BD59-A6C34878D82A}">
+                    <a16:rowId xmlns:a16="http://schemas.microsoft.com/office/drawing/2014/main" val="386262810"/>
+                  </a:ext>
+                </a:extLst>
+              </a:tr>
+              <a:tr h="370840">
+                <a:tc>
+                  <a:txBody>
+                    <a:bodyPr/>
+                    <a:lstStyle/>
+                    <a:p>
+                      <a:pPr marL="0" algn="l" defTabSz="914400" rtl="0" eaLnBrk="1" latinLnBrk="0" hangingPunct="1"/>
+                      <a:endParaRPr lang="en-US" sz="1800" b="1" kern="1200" dirty="0">
+                        <a:solidFill>
+                          <a:schemeClr val="lt1"/>
+                        </a:solidFill>
+                        <a:latin typeface="+mn-lt"/>
+                        <a:ea typeface="+mn-ea"/>
+                        <a:cs typeface="+mn-cs"/>
+                      </a:endParaRPr>
+                    </a:p>
+                  </a:txBody>
+                  <a:tcPr>
+                    <a:solidFill>
+                      <a:schemeClr val="bg1">
+                        <a:lumMod val="50000"/>
+                      </a:schemeClr>
+                    </a:solidFill>
+                  </a:tcPr>
+                </a:tc>
+                <a:tc>
+                  <a:txBody>
+                    <a:bodyPr/>
+                    <a:lstStyle/>
+                    <a:p>
+                      <a:r>
+                        <a:rPr lang="en-US" dirty="0"/>
+                        <a:t>0</a:t>
+                      </a:r>
+                    </a:p>
+                  </a:txBody>
+                  <a:tcPr>
+                    <a:solidFill>
+                      <a:schemeClr val="bg1">
+                        <a:lumMod val="50000"/>
+                      </a:schemeClr>
+                    </a:solidFill>
+                  </a:tcPr>
+                </a:tc>
+                <a:tc>
+                  <a:txBody>
+                    <a:bodyPr/>
+                    <a:lstStyle/>
+                    <a:p>
+                      <a:r>
+                        <a:rPr lang="en-US" dirty="0"/>
+                        <a:t>0</a:t>
+                      </a:r>
+                    </a:p>
+                  </a:txBody>
+                  <a:tcPr>
+                    <a:solidFill>
+                      <a:schemeClr val="bg1">
+                        <a:lumMod val="50000"/>
+                      </a:schemeClr>
+                    </a:solidFill>
+                  </a:tcPr>
+                </a:tc>
+                <a:tc>
+                  <a:txBody>
+                    <a:bodyPr/>
+                    <a:lstStyle/>
+                    <a:p>
+                      <a:r>
+                        <a:rPr lang="en-US" dirty="0"/>
+                        <a:t>0</a:t>
+                      </a:r>
+                    </a:p>
+                  </a:txBody>
+                  <a:tcPr>
+                    <a:solidFill>
+                      <a:schemeClr val="bg1">
+                        <a:lumMod val="50000"/>
+                      </a:schemeClr>
+                    </a:solidFill>
+                  </a:tcPr>
+                </a:tc>
+                <a:tc>
+                  <a:txBody>
+                    <a:bodyPr/>
+                    <a:lstStyle/>
+                    <a:p>
+                      <a:r>
+                        <a:rPr lang="en-US" dirty="0"/>
+                        <a:t>0</a:t>
+                      </a:r>
+                    </a:p>
+                  </a:txBody>
+                  <a:tcPr>
+                    <a:solidFill>
+                      <a:schemeClr val="bg1">
+                        <a:lumMod val="50000"/>
+                      </a:schemeClr>
+                    </a:solidFill>
+                  </a:tcPr>
+                </a:tc>
+                <a:tc>
+                  <a:txBody>
+                    <a:bodyPr/>
+                    <a:lstStyle/>
+                    <a:p>
+                      <a:r>
+                        <a:rPr lang="en-US" dirty="0"/>
+                        <a:t>0</a:t>
+                      </a:r>
+                    </a:p>
+                  </a:txBody>
+                  <a:tcPr>
+                    <a:solidFill>
+                      <a:schemeClr val="bg1">
+                        <a:lumMod val="50000"/>
+                      </a:schemeClr>
+                    </a:solidFill>
+                  </a:tcPr>
+                </a:tc>
+                <a:tc>
+                  <a:txBody>
+                    <a:bodyPr/>
+                    <a:lstStyle/>
+                    <a:p>
+                      <a:r>
+                        <a:rPr lang="en-US" dirty="0"/>
+                        <a:t>0</a:t>
+                      </a:r>
+                    </a:p>
+                  </a:txBody>
+                  <a:tcPr>
+                    <a:solidFill>
+                      <a:schemeClr val="bg1">
+                        <a:lumMod val="50000"/>
+                      </a:schemeClr>
+                    </a:solidFill>
+                  </a:tcPr>
+                </a:tc>
+                <a:tc>
+                  <a:txBody>
+                    <a:bodyPr/>
+                    <a:lstStyle/>
+                    <a:p>
+                      <a:r>
+                        <a:rPr lang="en-US" dirty="0"/>
+                        <a:t>0</a:t>
+                      </a:r>
+                    </a:p>
+                  </a:txBody>
+                  <a:tcPr>
+                    <a:solidFill>
+                      <a:schemeClr val="bg1">
+                        <a:lumMod val="50000"/>
+                      </a:schemeClr>
+                    </a:solidFill>
+                  </a:tcPr>
+                </a:tc>
+                <a:extLst>
+                  <a:ext uri="{0D108BD9-81ED-4DB2-BD59-A6C34878D82A}">
+                    <a16:rowId xmlns:a16="http://schemas.microsoft.com/office/drawing/2014/main" val="4054548687"/>
+                  </a:ext>
+                </a:extLst>
+              </a:tr>
+            </a:tbl>
+          </a:graphicData>
+        </a:graphic>
+      </p:graphicFrame>
+      <p:sp>
+        <p:nvSpPr>
+          <p:cNvPr id="9" name="TextBox 8">
+            <a:extLst>
+              <a:ext uri="{FF2B5EF4-FFF2-40B4-BE49-F238E27FC236}">
+                <a16:creationId xmlns:a16="http://schemas.microsoft.com/office/drawing/2014/main" id="{46D3EE58-30CD-C621-7DD5-4B0015227DDA}"/>
+              </a:ext>
+            </a:extLst>
+          </p:cNvPr>
+          <p:cNvSpPr txBox="1"/>
+          <p:nvPr/>
+        </p:nvSpPr>
+        <p:spPr>
+          <a:xfrm>
+            <a:off x="5280318" y="1090902"/>
+            <a:ext cx="822661" cy="369332"/>
+          </a:xfrm>
+          <a:prstGeom prst="rect">
+            <a:avLst/>
+          </a:prstGeom>
+          <a:noFill/>
+        </p:spPr>
+        <p:txBody>
+          <a:bodyPr wrap="none" rtlCol="0">
+            <a:spAutoFit/>
+          </a:bodyPr>
+          <a:lstStyle/>
+          <a:p>
+            <a:r>
+              <a:rPr lang="en-US" dirty="0" err="1">
+                <a:solidFill>
+                  <a:srgbClr val="FF0000"/>
+                </a:solidFill>
+              </a:rPr>
+              <a:t>max_ij</a:t>
+            </a:r>
+            <a:endParaRPr lang="en-US" dirty="0">
+              <a:solidFill>
+                <a:srgbClr val="FF0000"/>
+              </a:solidFill>
+            </a:endParaRPr>
+          </a:p>
+        </p:txBody>
+      </p:sp>
+      <p:graphicFrame>
+        <p:nvGraphicFramePr>
+          <p:cNvPr id="11" name="Table 10">
+            <a:extLst>
+              <a:ext uri="{FF2B5EF4-FFF2-40B4-BE49-F238E27FC236}">
+                <a16:creationId xmlns:a16="http://schemas.microsoft.com/office/drawing/2014/main" id="{5C9B9EC3-EC48-8E75-0862-3BAF7D6EA41E}"/>
+              </a:ext>
+            </a:extLst>
+          </p:cNvPr>
+          <p:cNvGraphicFramePr>
+            <a:graphicFrameLocks noGrp="1"/>
+          </p:cNvGraphicFramePr>
+          <p:nvPr/>
+        </p:nvGraphicFramePr>
+        <p:xfrm>
+          <a:off x="7912354" y="1601409"/>
+          <a:ext cx="2686960" cy="3337560"/>
+        </p:xfrm>
+        <a:graphic>
+          <a:graphicData uri="http://schemas.openxmlformats.org/drawingml/2006/table">
+            <a:tbl>
+              <a:tblPr firstRow="1" bandRow="1">
+                <a:tableStyleId>{5C22544A-7EE6-4342-B048-85BDC9FD1C3A}</a:tableStyleId>
+              </a:tblPr>
+              <a:tblGrid>
+                <a:gridCol w="335870">
+                  <a:extLst>
+                    <a:ext uri="{9D8B030D-6E8A-4147-A177-3AD203B41FA5}">
+                      <a16:colId xmlns:a16="http://schemas.microsoft.com/office/drawing/2014/main" val="4049008226"/>
+                    </a:ext>
+                  </a:extLst>
+                </a:gridCol>
+                <a:gridCol w="335870">
+                  <a:extLst>
+                    <a:ext uri="{9D8B030D-6E8A-4147-A177-3AD203B41FA5}">
+                      <a16:colId xmlns:a16="http://schemas.microsoft.com/office/drawing/2014/main" val="3478397847"/>
+                    </a:ext>
+                  </a:extLst>
+                </a:gridCol>
+                <a:gridCol w="335870">
+                  <a:extLst>
+                    <a:ext uri="{9D8B030D-6E8A-4147-A177-3AD203B41FA5}">
+                      <a16:colId xmlns:a16="http://schemas.microsoft.com/office/drawing/2014/main" val="3287294923"/>
+                    </a:ext>
+                  </a:extLst>
+                </a:gridCol>
+                <a:gridCol w="335870">
+                  <a:extLst>
+                    <a:ext uri="{9D8B030D-6E8A-4147-A177-3AD203B41FA5}">
+                      <a16:colId xmlns:a16="http://schemas.microsoft.com/office/drawing/2014/main" val="2977211747"/>
+                    </a:ext>
+                  </a:extLst>
+                </a:gridCol>
+                <a:gridCol w="335870">
+                  <a:extLst>
+                    <a:ext uri="{9D8B030D-6E8A-4147-A177-3AD203B41FA5}">
+                      <a16:colId xmlns:a16="http://schemas.microsoft.com/office/drawing/2014/main" val="3693455604"/>
+                    </a:ext>
+                  </a:extLst>
+                </a:gridCol>
+                <a:gridCol w="335870">
+                  <a:extLst>
+                    <a:ext uri="{9D8B030D-6E8A-4147-A177-3AD203B41FA5}">
+                      <a16:colId xmlns:a16="http://schemas.microsoft.com/office/drawing/2014/main" val="1044826715"/>
+                    </a:ext>
+                  </a:extLst>
+                </a:gridCol>
+                <a:gridCol w="335870">
+                  <a:extLst>
+                    <a:ext uri="{9D8B030D-6E8A-4147-A177-3AD203B41FA5}">
+                      <a16:colId xmlns:a16="http://schemas.microsoft.com/office/drawing/2014/main" val="1787000519"/>
+                    </a:ext>
+                  </a:extLst>
+                </a:gridCol>
+                <a:gridCol w="335870">
+                  <a:extLst>
+                    <a:ext uri="{9D8B030D-6E8A-4147-A177-3AD203B41FA5}">
+                      <a16:colId xmlns:a16="http://schemas.microsoft.com/office/drawing/2014/main" val="1257803747"/>
+                    </a:ext>
+                  </a:extLst>
+                </a:gridCol>
+              </a:tblGrid>
+              <a:tr h="370840">
+                <a:tc>
+                  <a:txBody>
+                    <a:bodyPr/>
+                    <a:lstStyle/>
+                    <a:p>
+                      <a:endParaRPr lang="en-US"/>
+                    </a:p>
+                  </a:txBody>
+                  <a:tcPr/>
+                </a:tc>
+                <a:tc>
+                  <a:txBody>
+                    <a:bodyPr/>
+                    <a:lstStyle/>
+                    <a:p>
+                      <a:r>
+                        <a:rPr lang="en-US" dirty="0"/>
+                        <a:t>a</a:t>
+                      </a:r>
+                    </a:p>
+                  </a:txBody>
+                  <a:tcPr/>
+                </a:tc>
+                <a:tc>
+                  <a:txBody>
+                    <a:bodyPr/>
+                    <a:lstStyle/>
+                    <a:p>
+                      <a:r>
+                        <a:rPr lang="en-US" dirty="0"/>
+                        <a:t>b</a:t>
+                      </a:r>
+                    </a:p>
+                  </a:txBody>
+                  <a:tcPr/>
+                </a:tc>
+                <a:tc>
+                  <a:txBody>
+                    <a:bodyPr/>
+                    <a:lstStyle/>
+                    <a:p>
+                      <a:r>
+                        <a:rPr lang="en-US" dirty="0"/>
+                        <a:t>c</a:t>
+                      </a:r>
+                    </a:p>
+                  </a:txBody>
+                  <a:tcPr/>
+                </a:tc>
+                <a:tc>
+                  <a:txBody>
+                    <a:bodyPr/>
+                    <a:lstStyle/>
+                    <a:p>
+                      <a:r>
+                        <a:rPr lang="en-US" dirty="0"/>
+                        <a:t>a</a:t>
+                      </a:r>
+                    </a:p>
+                  </a:txBody>
+                  <a:tcPr/>
+                </a:tc>
+                <a:tc>
+                  <a:txBody>
+                    <a:bodyPr/>
+                    <a:lstStyle/>
+                    <a:p>
+                      <a:r>
+                        <a:rPr lang="en-US" dirty="0"/>
+                        <a:t>b</a:t>
+                      </a:r>
+                    </a:p>
+                  </a:txBody>
+                  <a:tcPr/>
+                </a:tc>
+                <a:tc>
+                  <a:txBody>
+                    <a:bodyPr/>
+                    <a:lstStyle/>
+                    <a:p>
+                      <a:r>
+                        <a:rPr lang="en-US" dirty="0"/>
+                        <a:t>c</a:t>
+                      </a:r>
+                    </a:p>
+                  </a:txBody>
+                  <a:tcPr/>
+                </a:tc>
+                <a:tc>
+                  <a:txBody>
+                    <a:bodyPr/>
+                    <a:lstStyle/>
+                    <a:p>
+                      <a:endParaRPr lang="en-US" dirty="0"/>
+                    </a:p>
+                  </a:txBody>
+                  <a:tcPr>
+                    <a:solidFill>
+                      <a:schemeClr val="bg1">
+                        <a:lumMod val="50000"/>
+                      </a:schemeClr>
+                    </a:solidFill>
+                  </a:tcPr>
+                </a:tc>
+                <a:extLst>
+                  <a:ext uri="{0D108BD9-81ED-4DB2-BD59-A6C34878D82A}">
+                    <a16:rowId xmlns:a16="http://schemas.microsoft.com/office/drawing/2014/main" val="2410859909"/>
+                  </a:ext>
+                </a:extLst>
+              </a:tr>
+              <a:tr h="370840">
+                <a:tc>
+                  <a:txBody>
+                    <a:bodyPr/>
+                    <a:lstStyle/>
+                    <a:p>
+                      <a:pPr marL="0" algn="l" defTabSz="914400" rtl="0" eaLnBrk="1" latinLnBrk="0" hangingPunct="1"/>
+                      <a:r>
+                        <a:rPr lang="en-US" sz="1800" b="1" kern="1200" dirty="0">
+                          <a:solidFill>
+                            <a:schemeClr val="lt1"/>
+                          </a:solidFill>
+                          <a:latin typeface="+mn-lt"/>
+                          <a:ea typeface="+mn-ea"/>
+                          <a:cs typeface="+mn-cs"/>
+                        </a:rPr>
+                        <a:t>a</a:t>
+                      </a:r>
+                    </a:p>
+                  </a:txBody>
+                  <a:tcPr>
+                    <a:solidFill>
+                      <a:schemeClr val="accent1"/>
+                    </a:solidFill>
+                  </a:tcPr>
+                </a:tc>
+                <a:tc>
+                  <a:txBody>
+                    <a:bodyPr/>
+                    <a:lstStyle/>
+                    <a:p>
+                      <a:r>
+                        <a:rPr lang="en-US" b="1" dirty="0">
+                          <a:solidFill>
+                            <a:srgbClr val="FF0000"/>
+                          </a:solidFill>
+                        </a:rPr>
+                        <a:t>3</a:t>
+                      </a:r>
+                    </a:p>
+                  </a:txBody>
+                  <a:tcPr/>
+                </a:tc>
+                <a:tc>
+                  <a:txBody>
+                    <a:bodyPr/>
+                    <a:lstStyle/>
+                    <a:p>
+                      <a:r>
+                        <a:rPr lang="en-US" dirty="0"/>
+                        <a:t>3</a:t>
+                      </a:r>
+                    </a:p>
+                  </a:txBody>
+                  <a:tcPr/>
+                </a:tc>
+                <a:tc>
+                  <a:txBody>
+                    <a:bodyPr/>
+                    <a:lstStyle/>
+                    <a:p>
+                      <a:r>
+                        <a:rPr lang="en-US" dirty="0"/>
+                        <a:t>3</a:t>
+                      </a:r>
+                    </a:p>
+                  </a:txBody>
+                  <a:tcPr/>
+                </a:tc>
+                <a:tc>
+                  <a:txBody>
+                    <a:bodyPr/>
+                    <a:lstStyle/>
+                    <a:p>
+                      <a:r>
+                        <a:rPr lang="en-US" b="1" dirty="0">
+                          <a:solidFill>
+                            <a:srgbClr val="FF0000"/>
+                          </a:solidFill>
+                        </a:rPr>
+                        <a:t>3</a:t>
+                      </a:r>
+                    </a:p>
+                  </a:txBody>
+                  <a:tcPr/>
+                </a:tc>
+                <a:tc>
+                  <a:txBody>
+                    <a:bodyPr/>
+                    <a:lstStyle/>
+                    <a:p>
+                      <a:r>
+                        <a:rPr lang="en-US" dirty="0"/>
+                        <a:t>2</a:t>
+                      </a:r>
+                    </a:p>
+                  </a:txBody>
+                  <a:tcPr/>
+                </a:tc>
+                <a:tc>
+                  <a:txBody>
+                    <a:bodyPr/>
+                    <a:lstStyle/>
+                    <a:p>
+                      <a:r>
+                        <a:rPr lang="en-US" dirty="0"/>
+                        <a:t>1</a:t>
+                      </a:r>
+                    </a:p>
+                  </a:txBody>
+                  <a:tcPr/>
+                </a:tc>
+                <a:tc>
+                  <a:txBody>
+                    <a:bodyPr/>
+                    <a:lstStyle/>
+                    <a:p>
+                      <a:r>
+                        <a:rPr lang="en-US" dirty="0"/>
+                        <a:t>0</a:t>
+                      </a:r>
+                    </a:p>
+                  </a:txBody>
+                  <a:tcPr>
+                    <a:solidFill>
+                      <a:schemeClr val="bg1">
+                        <a:lumMod val="50000"/>
+                      </a:schemeClr>
+                    </a:solidFill>
+                  </a:tcPr>
+                </a:tc>
+                <a:extLst>
+                  <a:ext uri="{0D108BD9-81ED-4DB2-BD59-A6C34878D82A}">
+                    <a16:rowId xmlns:a16="http://schemas.microsoft.com/office/drawing/2014/main" val="2314656069"/>
+                  </a:ext>
+                </a:extLst>
+              </a:tr>
+              <a:tr h="370840">
+                <a:tc>
+                  <a:txBody>
+                    <a:bodyPr/>
+                    <a:lstStyle/>
+                    <a:p>
+                      <a:pPr marL="0" algn="l" defTabSz="914400" rtl="0" eaLnBrk="1" latinLnBrk="0" hangingPunct="1"/>
+                      <a:r>
+                        <a:rPr lang="en-US" sz="1800" b="1" kern="1200" dirty="0">
+                          <a:solidFill>
+                            <a:schemeClr val="lt1"/>
+                          </a:solidFill>
+                          <a:latin typeface="+mn-lt"/>
+                          <a:ea typeface="+mn-ea"/>
+                          <a:cs typeface="+mn-cs"/>
+                        </a:rPr>
+                        <a:t>b</a:t>
+                      </a:r>
+                    </a:p>
+                  </a:txBody>
+                  <a:tcPr>
+                    <a:solidFill>
+                      <a:schemeClr val="accent1"/>
+                    </a:solidFill>
+                  </a:tcPr>
+                </a:tc>
+                <a:tc>
+                  <a:txBody>
+                    <a:bodyPr/>
+                    <a:lstStyle/>
+                    <a:p>
+                      <a:r>
+                        <a:rPr lang="en-US" dirty="0"/>
+                        <a:t>2</a:t>
+                      </a:r>
+                    </a:p>
+                  </a:txBody>
+                  <a:tcPr/>
+                </a:tc>
+                <a:tc>
+                  <a:txBody>
+                    <a:bodyPr/>
+                    <a:lstStyle/>
+                    <a:p>
+                      <a:r>
+                        <a:rPr lang="en-US" dirty="0"/>
+                        <a:t>2</a:t>
+                      </a:r>
+                    </a:p>
+                  </a:txBody>
+                  <a:tcPr/>
+                </a:tc>
+                <a:tc>
+                  <a:txBody>
+                    <a:bodyPr/>
+                    <a:lstStyle/>
+                    <a:p>
+                      <a:r>
+                        <a:rPr lang="en-US" dirty="0"/>
+                        <a:t>2</a:t>
+                      </a:r>
+                    </a:p>
+                  </a:txBody>
+                  <a:tcPr/>
+                </a:tc>
+                <a:tc>
+                  <a:txBody>
+                    <a:bodyPr/>
+                    <a:lstStyle/>
+                    <a:p>
+                      <a:r>
+                        <a:rPr lang="en-US" dirty="0"/>
+                        <a:t>2</a:t>
+                      </a:r>
+                    </a:p>
+                  </a:txBody>
+                  <a:tcPr/>
+                </a:tc>
+                <a:tc>
+                  <a:txBody>
+                    <a:bodyPr/>
+                    <a:lstStyle/>
+                    <a:p>
+                      <a:r>
+                        <a:rPr lang="en-US" dirty="0"/>
+                        <a:t>2</a:t>
+                      </a:r>
+                    </a:p>
+                  </a:txBody>
+                  <a:tcPr/>
+                </a:tc>
+                <a:tc>
+                  <a:txBody>
+                    <a:bodyPr/>
+                    <a:lstStyle/>
+                    <a:p>
+                      <a:r>
+                        <a:rPr lang="en-US" dirty="0"/>
+                        <a:t>1</a:t>
+                      </a:r>
+                    </a:p>
+                  </a:txBody>
+                  <a:tcPr/>
+                </a:tc>
+                <a:tc>
+                  <a:txBody>
+                    <a:bodyPr/>
+                    <a:lstStyle/>
+                    <a:p>
+                      <a:r>
+                        <a:rPr lang="en-US" dirty="0"/>
+                        <a:t>0</a:t>
+                      </a:r>
+                    </a:p>
+                  </a:txBody>
+                  <a:tcPr>
+                    <a:solidFill>
+                      <a:schemeClr val="bg1">
+                        <a:lumMod val="50000"/>
+                      </a:schemeClr>
+                    </a:solidFill>
+                  </a:tcPr>
+                </a:tc>
+                <a:extLst>
+                  <a:ext uri="{0D108BD9-81ED-4DB2-BD59-A6C34878D82A}">
+                    <a16:rowId xmlns:a16="http://schemas.microsoft.com/office/drawing/2014/main" val="2121185516"/>
+                  </a:ext>
+                </a:extLst>
+              </a:tr>
+              <a:tr h="370840">
+                <a:tc>
+                  <a:txBody>
+                    <a:bodyPr/>
+                    <a:lstStyle/>
+                    <a:p>
+                      <a:pPr marL="0" algn="l" defTabSz="914400" rtl="0" eaLnBrk="1" latinLnBrk="0" hangingPunct="1"/>
+                      <a:r>
+                        <a:rPr lang="en-US" sz="1800" b="1" kern="1200" dirty="0">
+                          <a:solidFill>
+                            <a:schemeClr val="lt1"/>
+                          </a:solidFill>
+                          <a:latin typeface="+mn-lt"/>
+                          <a:ea typeface="+mn-ea"/>
+                          <a:cs typeface="+mn-cs"/>
+                        </a:rPr>
+                        <a:t>c</a:t>
+                      </a:r>
+                    </a:p>
+                  </a:txBody>
+                  <a:tcPr>
+                    <a:solidFill>
+                      <a:schemeClr val="accent1"/>
+                    </a:solidFill>
+                  </a:tcPr>
+                </a:tc>
+                <a:tc>
+                  <a:txBody>
+                    <a:bodyPr/>
+                    <a:lstStyle/>
+                    <a:p>
+                      <a:r>
+                        <a:rPr lang="en-US" dirty="0"/>
+                        <a:t>1</a:t>
+                      </a:r>
+                    </a:p>
+                  </a:txBody>
+                  <a:tcPr/>
+                </a:tc>
+                <a:tc>
+                  <a:txBody>
+                    <a:bodyPr/>
+                    <a:lstStyle/>
+                    <a:p>
+                      <a:r>
+                        <a:rPr lang="en-US" dirty="0"/>
+                        <a:t>1</a:t>
+                      </a:r>
+                    </a:p>
+                  </a:txBody>
+                  <a:tcPr/>
+                </a:tc>
+                <a:tc>
+                  <a:txBody>
+                    <a:bodyPr/>
+                    <a:lstStyle/>
+                    <a:p>
+                      <a:r>
+                        <a:rPr lang="en-US" dirty="0"/>
+                        <a:t>1</a:t>
+                      </a:r>
+                    </a:p>
+                  </a:txBody>
+                  <a:tcPr/>
+                </a:tc>
+                <a:tc>
+                  <a:txBody>
+                    <a:bodyPr/>
+                    <a:lstStyle/>
+                    <a:p>
+                      <a:r>
+                        <a:rPr lang="en-US" dirty="0"/>
+                        <a:t>1</a:t>
+                      </a:r>
+                    </a:p>
+                  </a:txBody>
+                  <a:tcPr/>
+                </a:tc>
+                <a:tc>
+                  <a:txBody>
+                    <a:bodyPr/>
+                    <a:lstStyle/>
+                    <a:p>
+                      <a:r>
+                        <a:rPr lang="en-US" dirty="0"/>
+                        <a:t>1</a:t>
+                      </a:r>
+                    </a:p>
+                  </a:txBody>
+                  <a:tcPr/>
+                </a:tc>
+                <a:tc>
+                  <a:txBody>
+                    <a:bodyPr/>
+                    <a:lstStyle/>
+                    <a:p>
+                      <a:r>
+                        <a:rPr lang="en-US" dirty="0"/>
+                        <a:t>1</a:t>
+                      </a:r>
+                    </a:p>
+                  </a:txBody>
+                  <a:tcPr/>
+                </a:tc>
+                <a:tc>
+                  <a:txBody>
+                    <a:bodyPr/>
+                    <a:lstStyle/>
+                    <a:p>
+                      <a:r>
+                        <a:rPr lang="en-US" dirty="0"/>
+                        <a:t>0</a:t>
+                      </a:r>
+                    </a:p>
+                  </a:txBody>
+                  <a:tcPr>
+                    <a:solidFill>
+                      <a:schemeClr val="bg1">
+                        <a:lumMod val="50000"/>
+                      </a:schemeClr>
+                    </a:solidFill>
+                  </a:tcPr>
+                </a:tc>
+                <a:extLst>
+                  <a:ext uri="{0D108BD9-81ED-4DB2-BD59-A6C34878D82A}">
+                    <a16:rowId xmlns:a16="http://schemas.microsoft.com/office/drawing/2014/main" val="1398674406"/>
+                  </a:ext>
+                </a:extLst>
+              </a:tr>
+              <a:tr h="370840">
+                <a:tc>
+                  <a:txBody>
+                    <a:bodyPr/>
+                    <a:lstStyle/>
+                    <a:p>
+                      <a:pPr marL="0" algn="l" defTabSz="914400" rtl="0" eaLnBrk="1" latinLnBrk="0" hangingPunct="1"/>
+                      <a:endParaRPr lang="en-US" sz="1800" b="1" kern="1200" dirty="0">
+                        <a:solidFill>
+                          <a:schemeClr val="lt1"/>
+                        </a:solidFill>
+                        <a:latin typeface="+mn-lt"/>
+                        <a:ea typeface="+mn-ea"/>
+                        <a:cs typeface="+mn-cs"/>
+                      </a:endParaRPr>
+                    </a:p>
+                  </a:txBody>
+                  <a:tcPr>
+                    <a:solidFill>
+                      <a:schemeClr val="accent1"/>
+                    </a:solidFill>
+                  </a:tcPr>
+                </a:tc>
+                <a:tc>
+                  <a:txBody>
+                    <a:bodyPr/>
+                    <a:lstStyle/>
+                    <a:p>
+                      <a:r>
+                        <a:rPr lang="en-US" dirty="0"/>
+                        <a:t>0</a:t>
+                      </a:r>
+                    </a:p>
+                  </a:txBody>
+                  <a:tcPr>
+                    <a:solidFill>
+                      <a:schemeClr val="bg1">
+                        <a:lumMod val="50000"/>
+                      </a:schemeClr>
+                    </a:solidFill>
+                  </a:tcPr>
+                </a:tc>
+                <a:tc>
+                  <a:txBody>
+                    <a:bodyPr/>
+                    <a:lstStyle/>
+                    <a:p>
+                      <a:r>
+                        <a:rPr lang="en-US" dirty="0"/>
+                        <a:t>0</a:t>
+                      </a:r>
+                    </a:p>
+                  </a:txBody>
+                  <a:tcPr>
+                    <a:solidFill>
+                      <a:schemeClr val="bg1">
+                        <a:lumMod val="50000"/>
+                      </a:schemeClr>
+                    </a:solidFill>
+                  </a:tcPr>
+                </a:tc>
+                <a:tc>
+                  <a:txBody>
+                    <a:bodyPr/>
+                    <a:lstStyle/>
+                    <a:p>
+                      <a:r>
+                        <a:rPr lang="en-US" dirty="0"/>
+                        <a:t>0</a:t>
+                      </a:r>
+                    </a:p>
+                  </a:txBody>
+                  <a:tcPr>
+                    <a:solidFill>
+                      <a:schemeClr val="bg1">
+                        <a:lumMod val="50000"/>
+                      </a:schemeClr>
+                    </a:solidFill>
+                  </a:tcPr>
+                </a:tc>
+                <a:tc>
+                  <a:txBody>
+                    <a:bodyPr/>
+                    <a:lstStyle/>
+                    <a:p>
+                      <a:r>
+                        <a:rPr lang="en-US" dirty="0"/>
+                        <a:t>0</a:t>
+                      </a:r>
+                    </a:p>
+                  </a:txBody>
+                  <a:tcPr>
+                    <a:solidFill>
+                      <a:schemeClr val="bg1">
+                        <a:lumMod val="50000"/>
+                      </a:schemeClr>
+                    </a:solidFill>
+                  </a:tcPr>
+                </a:tc>
+                <a:tc>
+                  <a:txBody>
+                    <a:bodyPr/>
+                    <a:lstStyle/>
+                    <a:p>
+                      <a:r>
+                        <a:rPr lang="en-US" dirty="0"/>
+                        <a:t>0</a:t>
+                      </a:r>
+                    </a:p>
+                  </a:txBody>
+                  <a:tcPr>
+                    <a:solidFill>
+                      <a:schemeClr val="bg1">
+                        <a:lumMod val="50000"/>
+                      </a:schemeClr>
+                    </a:solidFill>
+                  </a:tcPr>
+                </a:tc>
+                <a:tc>
+                  <a:txBody>
+                    <a:bodyPr/>
+                    <a:lstStyle/>
+                    <a:p>
+                      <a:r>
+                        <a:rPr lang="en-US" dirty="0"/>
+                        <a:t>0</a:t>
+                      </a:r>
+                    </a:p>
+                  </a:txBody>
+                  <a:tcPr>
+                    <a:solidFill>
+                      <a:schemeClr val="bg1">
+                        <a:lumMod val="50000"/>
+                      </a:schemeClr>
+                    </a:solidFill>
+                  </a:tcPr>
+                </a:tc>
+                <a:tc>
+                  <a:txBody>
+                    <a:bodyPr/>
+                    <a:lstStyle/>
+                    <a:p>
+                      <a:r>
+                        <a:rPr lang="en-US" dirty="0"/>
+                        <a:t>0</a:t>
+                      </a:r>
+                    </a:p>
+                  </a:txBody>
+                  <a:tcPr>
+                    <a:solidFill>
+                      <a:schemeClr val="bg1">
+                        <a:lumMod val="50000"/>
+                      </a:schemeClr>
+                    </a:solidFill>
+                  </a:tcPr>
+                </a:tc>
+                <a:extLst>
+                  <a:ext uri="{0D108BD9-81ED-4DB2-BD59-A6C34878D82A}">
+                    <a16:rowId xmlns:a16="http://schemas.microsoft.com/office/drawing/2014/main" val="741044967"/>
+                  </a:ext>
+                </a:extLst>
+              </a:tr>
+              <a:tr h="370840">
+                <a:tc>
+                  <a:txBody>
+                    <a:bodyPr/>
+                    <a:lstStyle/>
+                    <a:p>
+                      <a:pPr marL="0" algn="l" defTabSz="914400" rtl="0" eaLnBrk="1" latinLnBrk="0" hangingPunct="1"/>
+                      <a:r>
+                        <a:rPr lang="en-US" sz="1800" b="1" kern="1200" dirty="0">
+                          <a:solidFill>
+                            <a:schemeClr val="lt1"/>
+                          </a:solidFill>
+                          <a:latin typeface="+mn-lt"/>
+                          <a:ea typeface="+mn-ea"/>
+                          <a:cs typeface="+mn-cs"/>
+                        </a:rPr>
+                        <a:t>a</a:t>
+                      </a:r>
+                    </a:p>
+                  </a:txBody>
+                  <a:tcPr>
+                    <a:solidFill>
+                      <a:schemeClr val="accent1"/>
+                    </a:solidFill>
+                  </a:tcPr>
+                </a:tc>
+                <a:tc>
+                  <a:txBody>
+                    <a:bodyPr/>
+                    <a:lstStyle/>
+                    <a:p>
+                      <a:r>
+                        <a:rPr lang="en-US" b="1" dirty="0">
+                          <a:solidFill>
+                            <a:srgbClr val="FF0000"/>
+                          </a:solidFill>
+                        </a:rPr>
+                        <a:t>3</a:t>
+                      </a:r>
+                    </a:p>
+                  </a:txBody>
+                  <a:tcPr/>
+                </a:tc>
+                <a:tc>
+                  <a:txBody>
+                    <a:bodyPr/>
+                    <a:lstStyle/>
+                    <a:p>
+                      <a:r>
+                        <a:rPr lang="en-US" dirty="0"/>
+                        <a:t>3</a:t>
+                      </a:r>
+                    </a:p>
+                  </a:txBody>
+                  <a:tcPr/>
+                </a:tc>
+                <a:tc>
+                  <a:txBody>
+                    <a:bodyPr/>
+                    <a:lstStyle/>
+                    <a:p>
+                      <a:r>
+                        <a:rPr lang="en-US" dirty="0"/>
+                        <a:t>3</a:t>
+                      </a:r>
+                    </a:p>
+                  </a:txBody>
+                  <a:tcPr/>
+                </a:tc>
+                <a:tc>
+                  <a:txBody>
+                    <a:bodyPr/>
+                    <a:lstStyle/>
+                    <a:p>
+                      <a:r>
+                        <a:rPr lang="en-US" b="1" dirty="0">
+                          <a:solidFill>
+                            <a:srgbClr val="FF0000"/>
+                          </a:solidFill>
+                        </a:rPr>
+                        <a:t>3</a:t>
+                      </a:r>
+                    </a:p>
+                  </a:txBody>
+                  <a:tcPr/>
+                </a:tc>
+                <a:tc>
+                  <a:txBody>
+                    <a:bodyPr/>
+                    <a:lstStyle/>
+                    <a:p>
+                      <a:r>
+                        <a:rPr lang="en-US" dirty="0"/>
+                        <a:t>2</a:t>
+                      </a:r>
+                    </a:p>
+                  </a:txBody>
+                  <a:tcPr/>
+                </a:tc>
+                <a:tc>
+                  <a:txBody>
+                    <a:bodyPr/>
+                    <a:lstStyle/>
+                    <a:p>
+                      <a:r>
+                        <a:rPr lang="en-US" dirty="0"/>
+                        <a:t>1</a:t>
+                      </a:r>
+                    </a:p>
+                  </a:txBody>
+                  <a:tcPr/>
+                </a:tc>
+                <a:tc>
+                  <a:txBody>
+                    <a:bodyPr/>
+                    <a:lstStyle/>
+                    <a:p>
+                      <a:r>
+                        <a:rPr lang="en-US" dirty="0"/>
+                        <a:t>0</a:t>
+                      </a:r>
+                    </a:p>
+                  </a:txBody>
+                  <a:tcPr>
+                    <a:solidFill>
+                      <a:schemeClr val="bg1">
+                        <a:lumMod val="50000"/>
+                      </a:schemeClr>
+                    </a:solidFill>
+                  </a:tcPr>
+                </a:tc>
+                <a:extLst>
+                  <a:ext uri="{0D108BD9-81ED-4DB2-BD59-A6C34878D82A}">
+                    <a16:rowId xmlns:a16="http://schemas.microsoft.com/office/drawing/2014/main" val="1254206590"/>
+                  </a:ext>
+                </a:extLst>
+              </a:tr>
+              <a:tr h="370840">
+                <a:tc>
+                  <a:txBody>
+                    <a:bodyPr/>
+                    <a:lstStyle/>
+                    <a:p>
+                      <a:pPr marL="0" algn="l" defTabSz="914400" rtl="0" eaLnBrk="1" latinLnBrk="0" hangingPunct="1"/>
+                      <a:r>
+                        <a:rPr lang="en-US" sz="1800" b="1" kern="1200" dirty="0">
+                          <a:solidFill>
+                            <a:schemeClr val="lt1"/>
+                          </a:solidFill>
+                          <a:latin typeface="+mn-lt"/>
+                          <a:ea typeface="+mn-ea"/>
+                          <a:cs typeface="+mn-cs"/>
+                        </a:rPr>
+                        <a:t>b</a:t>
+                      </a:r>
+                    </a:p>
+                  </a:txBody>
+                  <a:tcPr>
+                    <a:solidFill>
+                      <a:schemeClr val="accent1"/>
+                    </a:solidFill>
+                  </a:tcPr>
+                </a:tc>
+                <a:tc>
+                  <a:txBody>
+                    <a:bodyPr/>
+                    <a:lstStyle/>
+                    <a:p>
+                      <a:r>
+                        <a:rPr lang="en-US" dirty="0"/>
+                        <a:t>2</a:t>
+                      </a:r>
+                    </a:p>
+                  </a:txBody>
+                  <a:tcPr/>
+                </a:tc>
+                <a:tc>
+                  <a:txBody>
+                    <a:bodyPr/>
+                    <a:lstStyle/>
+                    <a:p>
+                      <a:r>
+                        <a:rPr lang="en-US" dirty="0"/>
+                        <a:t>2</a:t>
+                      </a:r>
+                    </a:p>
+                  </a:txBody>
+                  <a:tcPr/>
+                </a:tc>
+                <a:tc>
+                  <a:txBody>
+                    <a:bodyPr/>
+                    <a:lstStyle/>
+                    <a:p>
+                      <a:r>
+                        <a:rPr lang="en-US" dirty="0"/>
+                        <a:t>2</a:t>
+                      </a:r>
+                    </a:p>
+                  </a:txBody>
+                  <a:tcPr/>
+                </a:tc>
+                <a:tc>
+                  <a:txBody>
+                    <a:bodyPr/>
+                    <a:lstStyle/>
+                    <a:p>
+                      <a:r>
+                        <a:rPr lang="en-US" dirty="0"/>
+                        <a:t>2</a:t>
+                      </a:r>
+                    </a:p>
+                  </a:txBody>
+                  <a:tcPr/>
+                </a:tc>
+                <a:tc>
+                  <a:txBody>
+                    <a:bodyPr/>
+                    <a:lstStyle/>
+                    <a:p>
+                      <a:r>
+                        <a:rPr lang="en-US" dirty="0"/>
+                        <a:t>2</a:t>
+                      </a:r>
+                    </a:p>
+                  </a:txBody>
+                  <a:tcPr/>
+                </a:tc>
+                <a:tc>
+                  <a:txBody>
+                    <a:bodyPr/>
+                    <a:lstStyle/>
+                    <a:p>
+                      <a:r>
+                        <a:rPr lang="en-US" dirty="0"/>
+                        <a:t>1</a:t>
+                      </a:r>
+                    </a:p>
+                  </a:txBody>
+                  <a:tcPr/>
+                </a:tc>
+                <a:tc>
+                  <a:txBody>
+                    <a:bodyPr/>
+                    <a:lstStyle/>
+                    <a:p>
+                      <a:r>
+                        <a:rPr lang="en-US" dirty="0"/>
+                        <a:t>0</a:t>
+                      </a:r>
+                    </a:p>
+                  </a:txBody>
+                  <a:tcPr>
+                    <a:solidFill>
+                      <a:schemeClr val="bg1">
+                        <a:lumMod val="50000"/>
+                      </a:schemeClr>
+                    </a:solidFill>
+                  </a:tcPr>
+                </a:tc>
+                <a:extLst>
+                  <a:ext uri="{0D108BD9-81ED-4DB2-BD59-A6C34878D82A}">
+                    <a16:rowId xmlns:a16="http://schemas.microsoft.com/office/drawing/2014/main" val="2572115340"/>
+                  </a:ext>
+                </a:extLst>
+              </a:tr>
+              <a:tr h="370840">
+                <a:tc>
+                  <a:txBody>
+                    <a:bodyPr/>
+                    <a:lstStyle/>
+                    <a:p>
+                      <a:pPr marL="0" algn="l" defTabSz="914400" rtl="0" eaLnBrk="1" latinLnBrk="0" hangingPunct="1"/>
+                      <a:r>
+                        <a:rPr lang="en-US" sz="1800" b="1" kern="1200" dirty="0">
+                          <a:solidFill>
+                            <a:schemeClr val="lt1"/>
+                          </a:solidFill>
+                          <a:latin typeface="+mn-lt"/>
+                          <a:ea typeface="+mn-ea"/>
+                          <a:cs typeface="+mn-cs"/>
+                        </a:rPr>
+                        <a:t>c</a:t>
+                      </a:r>
+                    </a:p>
+                  </a:txBody>
+                  <a:tcPr>
+                    <a:solidFill>
+                      <a:schemeClr val="accent1"/>
+                    </a:solidFill>
+                  </a:tcPr>
+                </a:tc>
+                <a:tc>
+                  <a:txBody>
+                    <a:bodyPr/>
+                    <a:lstStyle/>
+                    <a:p>
+                      <a:r>
+                        <a:rPr lang="en-US" dirty="0"/>
+                        <a:t>1</a:t>
+                      </a:r>
+                    </a:p>
+                  </a:txBody>
+                  <a:tcPr/>
+                </a:tc>
+                <a:tc>
+                  <a:txBody>
+                    <a:bodyPr/>
+                    <a:lstStyle/>
+                    <a:p>
+                      <a:r>
+                        <a:rPr lang="en-US" dirty="0"/>
+                        <a:t>1</a:t>
+                      </a:r>
+                    </a:p>
+                  </a:txBody>
+                  <a:tcPr/>
+                </a:tc>
+                <a:tc>
+                  <a:txBody>
+                    <a:bodyPr/>
+                    <a:lstStyle/>
+                    <a:p>
+                      <a:r>
+                        <a:rPr lang="en-US" dirty="0"/>
+                        <a:t>1</a:t>
+                      </a:r>
+                    </a:p>
+                  </a:txBody>
+                  <a:tcPr/>
+                </a:tc>
+                <a:tc>
+                  <a:txBody>
+                    <a:bodyPr/>
+                    <a:lstStyle/>
+                    <a:p>
+                      <a:r>
+                        <a:rPr lang="en-US" dirty="0"/>
+                        <a:t>1</a:t>
+                      </a:r>
+                    </a:p>
+                  </a:txBody>
+                  <a:tcPr/>
+                </a:tc>
+                <a:tc>
+                  <a:txBody>
+                    <a:bodyPr/>
+                    <a:lstStyle/>
+                    <a:p>
+                      <a:r>
+                        <a:rPr lang="en-US" dirty="0"/>
+                        <a:t>1</a:t>
+                      </a:r>
+                    </a:p>
+                  </a:txBody>
+                  <a:tcPr/>
+                </a:tc>
+                <a:tc>
+                  <a:txBody>
+                    <a:bodyPr/>
+                    <a:lstStyle/>
+                    <a:p>
+                      <a:r>
+                        <a:rPr lang="en-US" dirty="0"/>
+                        <a:t>1</a:t>
+                      </a:r>
+                    </a:p>
+                  </a:txBody>
+                  <a:tcPr/>
+                </a:tc>
+                <a:tc>
+                  <a:txBody>
+                    <a:bodyPr/>
+                    <a:lstStyle/>
+                    <a:p>
+                      <a:r>
+                        <a:rPr lang="en-US" dirty="0"/>
+                        <a:t>0</a:t>
+                      </a:r>
+                    </a:p>
+                  </a:txBody>
+                  <a:tcPr>
+                    <a:solidFill>
+                      <a:schemeClr val="bg1">
+                        <a:lumMod val="50000"/>
+                      </a:schemeClr>
+                    </a:solidFill>
+                  </a:tcPr>
+                </a:tc>
+                <a:extLst>
+                  <a:ext uri="{0D108BD9-81ED-4DB2-BD59-A6C34878D82A}">
+                    <a16:rowId xmlns:a16="http://schemas.microsoft.com/office/drawing/2014/main" val="386262810"/>
+                  </a:ext>
+                </a:extLst>
+              </a:tr>
+              <a:tr h="370840">
+                <a:tc>
+                  <a:txBody>
+                    <a:bodyPr/>
+                    <a:lstStyle/>
+                    <a:p>
+                      <a:pPr marL="0" algn="l" defTabSz="914400" rtl="0" eaLnBrk="1" latinLnBrk="0" hangingPunct="1"/>
+                      <a:endParaRPr lang="en-US" sz="1800" b="1" kern="1200" dirty="0">
+                        <a:solidFill>
+                          <a:schemeClr val="lt1"/>
+                        </a:solidFill>
+                        <a:latin typeface="+mn-lt"/>
+                        <a:ea typeface="+mn-ea"/>
+                        <a:cs typeface="+mn-cs"/>
+                      </a:endParaRPr>
+                    </a:p>
+                  </a:txBody>
+                  <a:tcPr>
+                    <a:solidFill>
+                      <a:schemeClr val="bg1">
+                        <a:lumMod val="50000"/>
+                      </a:schemeClr>
+                    </a:solidFill>
+                  </a:tcPr>
+                </a:tc>
+                <a:tc>
+                  <a:txBody>
+                    <a:bodyPr/>
+                    <a:lstStyle/>
+                    <a:p>
+                      <a:r>
+                        <a:rPr lang="en-US" dirty="0"/>
+                        <a:t>0</a:t>
+                      </a:r>
+                    </a:p>
+                  </a:txBody>
+                  <a:tcPr>
+                    <a:solidFill>
+                      <a:schemeClr val="bg1">
+                        <a:lumMod val="50000"/>
+                      </a:schemeClr>
+                    </a:solidFill>
+                  </a:tcPr>
+                </a:tc>
+                <a:tc>
+                  <a:txBody>
+                    <a:bodyPr/>
+                    <a:lstStyle/>
+                    <a:p>
+                      <a:r>
+                        <a:rPr lang="en-US" dirty="0"/>
+                        <a:t>0</a:t>
+                      </a:r>
+                    </a:p>
+                  </a:txBody>
+                  <a:tcPr>
+                    <a:solidFill>
+                      <a:schemeClr val="bg1">
+                        <a:lumMod val="50000"/>
+                      </a:schemeClr>
+                    </a:solidFill>
+                  </a:tcPr>
+                </a:tc>
+                <a:tc>
+                  <a:txBody>
+                    <a:bodyPr/>
+                    <a:lstStyle/>
+                    <a:p>
+                      <a:r>
+                        <a:rPr lang="en-US" dirty="0"/>
+                        <a:t>0</a:t>
+                      </a:r>
+                    </a:p>
+                  </a:txBody>
+                  <a:tcPr>
+                    <a:solidFill>
+                      <a:schemeClr val="bg1">
+                        <a:lumMod val="50000"/>
+                      </a:schemeClr>
+                    </a:solidFill>
+                  </a:tcPr>
+                </a:tc>
+                <a:tc>
+                  <a:txBody>
+                    <a:bodyPr/>
+                    <a:lstStyle/>
+                    <a:p>
+                      <a:r>
+                        <a:rPr lang="en-US" dirty="0"/>
+                        <a:t>0</a:t>
+                      </a:r>
+                    </a:p>
+                  </a:txBody>
+                  <a:tcPr>
+                    <a:solidFill>
+                      <a:schemeClr val="bg1">
+                        <a:lumMod val="50000"/>
+                      </a:schemeClr>
+                    </a:solidFill>
+                  </a:tcPr>
+                </a:tc>
+                <a:tc>
+                  <a:txBody>
+                    <a:bodyPr/>
+                    <a:lstStyle/>
+                    <a:p>
+                      <a:r>
+                        <a:rPr lang="en-US" dirty="0"/>
+                        <a:t>0</a:t>
+                      </a:r>
+                    </a:p>
+                  </a:txBody>
+                  <a:tcPr>
+                    <a:solidFill>
+                      <a:schemeClr val="bg1">
+                        <a:lumMod val="50000"/>
+                      </a:schemeClr>
+                    </a:solidFill>
+                  </a:tcPr>
+                </a:tc>
+                <a:tc>
+                  <a:txBody>
+                    <a:bodyPr/>
+                    <a:lstStyle/>
+                    <a:p>
+                      <a:r>
+                        <a:rPr lang="en-US" dirty="0"/>
+                        <a:t>0</a:t>
+                      </a:r>
+                    </a:p>
+                  </a:txBody>
+                  <a:tcPr>
+                    <a:solidFill>
+                      <a:schemeClr val="bg1">
+                        <a:lumMod val="50000"/>
+                      </a:schemeClr>
+                    </a:solidFill>
+                  </a:tcPr>
+                </a:tc>
+                <a:tc>
+                  <a:txBody>
+                    <a:bodyPr/>
+                    <a:lstStyle/>
+                    <a:p>
+                      <a:r>
+                        <a:rPr lang="en-US" dirty="0"/>
+                        <a:t>0</a:t>
+                      </a:r>
+                    </a:p>
+                  </a:txBody>
+                  <a:tcPr>
+                    <a:solidFill>
+                      <a:schemeClr val="bg1">
+                        <a:lumMod val="50000"/>
+                      </a:schemeClr>
+                    </a:solidFill>
+                  </a:tcPr>
+                </a:tc>
+                <a:extLst>
+                  <a:ext uri="{0D108BD9-81ED-4DB2-BD59-A6C34878D82A}">
+                    <a16:rowId xmlns:a16="http://schemas.microsoft.com/office/drawing/2014/main" val="4054548687"/>
+                  </a:ext>
+                </a:extLst>
+              </a:tr>
+            </a:tbl>
+          </a:graphicData>
+        </a:graphic>
+      </p:graphicFrame>
+      <p:cxnSp>
+        <p:nvCxnSpPr>
+          <p:cNvPr id="13" name="Straight Arrow Connector 12">
+            <a:extLst>
+              <a:ext uri="{FF2B5EF4-FFF2-40B4-BE49-F238E27FC236}">
+                <a16:creationId xmlns:a16="http://schemas.microsoft.com/office/drawing/2014/main" id="{1318EF54-D004-1FD6-9C03-469025E88987}"/>
+              </a:ext>
+            </a:extLst>
+          </p:cNvPr>
+          <p:cNvCxnSpPr/>
+          <p:nvPr/>
+        </p:nvCxnSpPr>
+        <p:spPr>
+          <a:xfrm>
+            <a:off x="8412480" y="2157984"/>
+            <a:ext cx="301752" cy="347472"/>
+          </a:xfrm>
+          <a:prstGeom prst="straightConnector1">
+            <a:avLst/>
+          </a:prstGeom>
+          <a:ln>
+            <a:solidFill>
+              <a:srgbClr val="FF0000"/>
+            </a:solidFill>
+            <a:tailEnd type="triangle"/>
+          </a:ln>
+        </p:spPr>
+        <p:style>
+          <a:lnRef idx="2">
+            <a:schemeClr val="accent1"/>
+          </a:lnRef>
+          <a:fillRef idx="0">
+            <a:schemeClr val="accent1"/>
+          </a:fillRef>
+          <a:effectRef idx="1">
+            <a:schemeClr val="accent1"/>
+          </a:effectRef>
+          <a:fontRef idx="minor">
+            <a:schemeClr val="tx1"/>
+          </a:fontRef>
+        </p:style>
+      </p:cxnSp>
+      <p:cxnSp>
+        <p:nvCxnSpPr>
+          <p:cNvPr id="14" name="Straight Arrow Connector 13">
+            <a:extLst>
+              <a:ext uri="{FF2B5EF4-FFF2-40B4-BE49-F238E27FC236}">
+                <a16:creationId xmlns:a16="http://schemas.microsoft.com/office/drawing/2014/main" id="{126685CF-6B6B-2DB3-2C15-90AFB4B68BCF}"/>
+              </a:ext>
+            </a:extLst>
+          </p:cNvPr>
+          <p:cNvCxnSpPr/>
+          <p:nvPr/>
+        </p:nvCxnSpPr>
+        <p:spPr>
+          <a:xfrm>
+            <a:off x="8811768" y="2584704"/>
+            <a:ext cx="301752" cy="347472"/>
+          </a:xfrm>
+          <a:prstGeom prst="straightConnector1">
+            <a:avLst/>
+          </a:prstGeom>
+          <a:ln>
+            <a:solidFill>
+              <a:srgbClr val="FF0000"/>
+            </a:solidFill>
+            <a:tailEnd type="triangle"/>
+          </a:ln>
+        </p:spPr>
+        <p:style>
+          <a:lnRef idx="2">
+            <a:schemeClr val="accent1"/>
+          </a:lnRef>
+          <a:fillRef idx="0">
+            <a:schemeClr val="accent1"/>
+          </a:fillRef>
+          <a:effectRef idx="1">
+            <a:schemeClr val="accent1"/>
+          </a:effectRef>
+          <a:fontRef idx="minor">
+            <a:schemeClr val="tx1"/>
+          </a:fontRef>
+        </p:style>
+      </p:cxnSp>
+      <p:cxnSp>
+        <p:nvCxnSpPr>
+          <p:cNvPr id="16" name="Straight Arrow Connector 15">
+            <a:extLst>
+              <a:ext uri="{FF2B5EF4-FFF2-40B4-BE49-F238E27FC236}">
+                <a16:creationId xmlns:a16="http://schemas.microsoft.com/office/drawing/2014/main" id="{DDE2E9E9-3362-1472-1352-1FBEE8DDC8CE}"/>
+              </a:ext>
+            </a:extLst>
+          </p:cNvPr>
+          <p:cNvCxnSpPr/>
+          <p:nvPr/>
+        </p:nvCxnSpPr>
+        <p:spPr>
+          <a:xfrm>
+            <a:off x="9375500" y="2090928"/>
+            <a:ext cx="301752" cy="347472"/>
+          </a:xfrm>
+          <a:prstGeom prst="straightConnector1">
+            <a:avLst/>
+          </a:prstGeom>
+          <a:ln>
+            <a:solidFill>
+              <a:srgbClr val="FF0000"/>
+            </a:solidFill>
+            <a:tailEnd type="triangle"/>
+          </a:ln>
+        </p:spPr>
+        <p:style>
+          <a:lnRef idx="2">
+            <a:schemeClr val="accent1"/>
+          </a:lnRef>
+          <a:fillRef idx="0">
+            <a:schemeClr val="accent1"/>
+          </a:fillRef>
+          <a:effectRef idx="1">
+            <a:schemeClr val="accent1"/>
+          </a:effectRef>
+          <a:fontRef idx="minor">
+            <a:schemeClr val="tx1"/>
+          </a:fontRef>
+        </p:style>
+      </p:cxnSp>
+      <p:cxnSp>
+        <p:nvCxnSpPr>
+          <p:cNvPr id="17" name="Straight Arrow Connector 16">
+            <a:extLst>
+              <a:ext uri="{FF2B5EF4-FFF2-40B4-BE49-F238E27FC236}">
+                <a16:creationId xmlns:a16="http://schemas.microsoft.com/office/drawing/2014/main" id="{4B3CFA77-5282-C0E2-6384-A20A50C616FD}"/>
+              </a:ext>
+            </a:extLst>
+          </p:cNvPr>
+          <p:cNvCxnSpPr/>
+          <p:nvPr/>
+        </p:nvCxnSpPr>
+        <p:spPr>
+          <a:xfrm>
+            <a:off x="9774788" y="2517648"/>
+            <a:ext cx="301752" cy="347472"/>
+          </a:xfrm>
+          <a:prstGeom prst="straightConnector1">
+            <a:avLst/>
+          </a:prstGeom>
+          <a:ln>
+            <a:solidFill>
+              <a:srgbClr val="FF0000"/>
+            </a:solidFill>
+            <a:tailEnd type="triangle"/>
+          </a:ln>
+        </p:spPr>
+        <p:style>
+          <a:lnRef idx="2">
+            <a:schemeClr val="accent1"/>
+          </a:lnRef>
+          <a:fillRef idx="0">
+            <a:schemeClr val="accent1"/>
+          </a:fillRef>
+          <a:effectRef idx="1">
+            <a:schemeClr val="accent1"/>
+          </a:effectRef>
+          <a:fontRef idx="minor">
+            <a:schemeClr val="tx1"/>
+          </a:fontRef>
+        </p:style>
+      </p:cxnSp>
+      <p:cxnSp>
+        <p:nvCxnSpPr>
+          <p:cNvPr id="18" name="Straight Arrow Connector 17">
+            <a:extLst>
+              <a:ext uri="{FF2B5EF4-FFF2-40B4-BE49-F238E27FC236}">
+                <a16:creationId xmlns:a16="http://schemas.microsoft.com/office/drawing/2014/main" id="{E303F3B0-8315-5867-62DF-F6365538C58A}"/>
+              </a:ext>
+            </a:extLst>
+          </p:cNvPr>
+          <p:cNvCxnSpPr/>
+          <p:nvPr/>
+        </p:nvCxnSpPr>
+        <p:spPr>
+          <a:xfrm>
+            <a:off x="8412480" y="3602737"/>
+            <a:ext cx="301752" cy="347472"/>
+          </a:xfrm>
+          <a:prstGeom prst="straightConnector1">
+            <a:avLst/>
+          </a:prstGeom>
+          <a:ln>
+            <a:solidFill>
+              <a:srgbClr val="FF0000"/>
+            </a:solidFill>
+            <a:tailEnd type="triangle"/>
+          </a:ln>
+        </p:spPr>
+        <p:style>
+          <a:lnRef idx="2">
+            <a:schemeClr val="accent1"/>
+          </a:lnRef>
+          <a:fillRef idx="0">
+            <a:schemeClr val="accent1"/>
+          </a:fillRef>
+          <a:effectRef idx="1">
+            <a:schemeClr val="accent1"/>
+          </a:effectRef>
+          <a:fontRef idx="minor">
+            <a:schemeClr val="tx1"/>
+          </a:fontRef>
+        </p:style>
+      </p:cxnSp>
+      <p:cxnSp>
+        <p:nvCxnSpPr>
+          <p:cNvPr id="19" name="Straight Arrow Connector 18">
+            <a:extLst>
+              <a:ext uri="{FF2B5EF4-FFF2-40B4-BE49-F238E27FC236}">
+                <a16:creationId xmlns:a16="http://schemas.microsoft.com/office/drawing/2014/main" id="{96509089-9B0C-AE90-B363-D8215FC1C6B8}"/>
+              </a:ext>
+            </a:extLst>
+          </p:cNvPr>
+          <p:cNvCxnSpPr/>
+          <p:nvPr/>
+        </p:nvCxnSpPr>
+        <p:spPr>
+          <a:xfrm>
+            <a:off x="8811768" y="4029457"/>
+            <a:ext cx="301752" cy="347472"/>
+          </a:xfrm>
+          <a:prstGeom prst="straightConnector1">
+            <a:avLst/>
+          </a:prstGeom>
+          <a:ln>
+            <a:solidFill>
+              <a:srgbClr val="FF0000"/>
+            </a:solidFill>
+            <a:tailEnd type="triangle"/>
+          </a:ln>
+        </p:spPr>
+        <p:style>
+          <a:lnRef idx="2">
+            <a:schemeClr val="accent1"/>
+          </a:lnRef>
+          <a:fillRef idx="0">
+            <a:schemeClr val="accent1"/>
+          </a:fillRef>
+          <a:effectRef idx="1">
+            <a:schemeClr val="accent1"/>
+          </a:effectRef>
+          <a:fontRef idx="minor">
+            <a:schemeClr val="tx1"/>
+          </a:fontRef>
+        </p:style>
+      </p:cxnSp>
+      <p:cxnSp>
+        <p:nvCxnSpPr>
+          <p:cNvPr id="20" name="Straight Arrow Connector 19">
+            <a:extLst>
+              <a:ext uri="{FF2B5EF4-FFF2-40B4-BE49-F238E27FC236}">
+                <a16:creationId xmlns:a16="http://schemas.microsoft.com/office/drawing/2014/main" id="{88604241-EB58-E9E8-E8C3-ECD83191E785}"/>
+              </a:ext>
+            </a:extLst>
+          </p:cNvPr>
+          <p:cNvCxnSpPr/>
+          <p:nvPr/>
+        </p:nvCxnSpPr>
+        <p:spPr>
+          <a:xfrm>
+            <a:off x="9399884" y="3645409"/>
+            <a:ext cx="301752" cy="347472"/>
+          </a:xfrm>
+          <a:prstGeom prst="straightConnector1">
+            <a:avLst/>
+          </a:prstGeom>
+          <a:ln>
+            <a:solidFill>
+              <a:srgbClr val="FF0000"/>
+            </a:solidFill>
+            <a:tailEnd type="triangle"/>
+          </a:ln>
+        </p:spPr>
+        <p:style>
+          <a:lnRef idx="2">
+            <a:schemeClr val="accent1"/>
+          </a:lnRef>
+          <a:fillRef idx="0">
+            <a:schemeClr val="accent1"/>
+          </a:fillRef>
+          <a:effectRef idx="1">
+            <a:schemeClr val="accent1"/>
+          </a:effectRef>
+          <a:fontRef idx="minor">
+            <a:schemeClr val="tx1"/>
+          </a:fontRef>
+        </p:style>
+      </p:cxnSp>
+      <p:cxnSp>
+        <p:nvCxnSpPr>
+          <p:cNvPr id="21" name="Straight Arrow Connector 20">
+            <a:extLst>
+              <a:ext uri="{FF2B5EF4-FFF2-40B4-BE49-F238E27FC236}">
+                <a16:creationId xmlns:a16="http://schemas.microsoft.com/office/drawing/2014/main" id="{B1E57081-E4CB-415B-B724-1B71051A5B40}"/>
+              </a:ext>
+            </a:extLst>
+          </p:cNvPr>
+          <p:cNvCxnSpPr/>
+          <p:nvPr/>
+        </p:nvCxnSpPr>
+        <p:spPr>
+          <a:xfrm>
+            <a:off x="9799172" y="4072129"/>
+            <a:ext cx="301752" cy="347472"/>
+          </a:xfrm>
+          <a:prstGeom prst="straightConnector1">
+            <a:avLst/>
+          </a:prstGeom>
+          <a:ln>
+            <a:solidFill>
+              <a:srgbClr val="FF0000"/>
+            </a:solidFill>
+            <a:tailEnd type="triangle"/>
+          </a:ln>
+        </p:spPr>
+        <p:style>
+          <a:lnRef idx="2">
+            <a:schemeClr val="accent1"/>
+          </a:lnRef>
+          <a:fillRef idx="0">
+            <a:schemeClr val="accent1"/>
+          </a:fillRef>
+          <a:effectRef idx="1">
+            <a:schemeClr val="accent1"/>
+          </a:effectRef>
+          <a:fontRef idx="minor">
+            <a:schemeClr val="tx1"/>
+          </a:fontRef>
+        </p:style>
+      </p:cxnSp>
+      <p:sp>
+        <p:nvSpPr>
+          <p:cNvPr id="22" name="TextBox 21">
+            <a:extLst>
+              <a:ext uri="{FF2B5EF4-FFF2-40B4-BE49-F238E27FC236}">
+                <a16:creationId xmlns:a16="http://schemas.microsoft.com/office/drawing/2014/main" id="{247F154C-8F57-3EF2-9568-56A47879381C}"/>
+              </a:ext>
+            </a:extLst>
+          </p:cNvPr>
+          <p:cNvSpPr txBox="1"/>
+          <p:nvPr/>
+        </p:nvSpPr>
+        <p:spPr>
+          <a:xfrm>
+            <a:off x="8820764" y="1096999"/>
+            <a:ext cx="596638" cy="369332"/>
+          </a:xfrm>
+          <a:prstGeom prst="rect">
+            <a:avLst/>
+          </a:prstGeom>
+          <a:noFill/>
+        </p:spPr>
+        <p:txBody>
+          <a:bodyPr wrap="none" rtlCol="0">
+            <a:spAutoFit/>
+          </a:bodyPr>
+          <a:lstStyle/>
+          <a:p>
+            <a:r>
+              <a:rPr lang="en-US" dirty="0" err="1">
+                <a:solidFill>
+                  <a:srgbClr val="FF0000"/>
+                </a:solidFill>
+              </a:rPr>
+              <a:t>m_ij</a:t>
+            </a:r>
+            <a:endParaRPr lang="en-US" dirty="0">
+              <a:solidFill>
+                <a:srgbClr val="FF0000"/>
+              </a:solidFill>
+            </a:endParaRPr>
+          </a:p>
+        </p:txBody>
+      </p:sp>
+    </p:spTree>
+    <p:extLst>
+      <p:ext uri="{BB962C8B-B14F-4D97-AF65-F5344CB8AC3E}">
+        <p14:creationId xmlns:p14="http://schemas.microsoft.com/office/powerpoint/2010/main" val="1527752306"/>
+      </p:ext>
+    </p:extLst>
+  </p:cSld>
+  <p:clrMapOvr>
+    <a:masterClrMapping/>
+  </p:clrMapOvr>
+</p:sld>
+</file>
+
 <file path=ppt/theme/theme1.xml><?xml version="1.0" encoding="utf-8"?>
 <a:theme xmlns:a="http://schemas.openxmlformats.org/drawingml/2006/main" name="Office Theme">
   <a:themeElements>
@@ -8105,4 +12990,319 @@
     </a:ext>
   </a:extLst>
 </a:theme>
+</file>
+
+<file path=ppt/theme/theme2.xml><?xml version="1.0" encoding="utf-8"?>
+<a:theme xmlns:a="http://schemas.openxmlformats.org/drawingml/2006/main" name="Office Theme">
+  <a:themeElements>
+    <a:clrScheme name="Office">
+      <a:dk1>
+        <a:sysClr val="windowText" lastClr="000000"/>
+      </a:dk1>
+      <a:lt1>
+        <a:sysClr val="window" lastClr="FFFFFF"/>
+      </a:lt1>
+      <a:dk2>
+        <a:srgbClr val="0E2841"/>
+      </a:dk2>
+      <a:lt2>
+        <a:srgbClr val="E8E8E8"/>
+      </a:lt2>
+      <a:accent1>
+        <a:srgbClr val="156082"/>
+      </a:accent1>
+      <a:accent2>
+        <a:srgbClr val="E97132"/>
+      </a:accent2>
+      <a:accent3>
+        <a:srgbClr val="196B24"/>
+      </a:accent3>
+      <a:accent4>
+        <a:srgbClr val="0F9ED5"/>
+      </a:accent4>
+      <a:accent5>
+        <a:srgbClr val="A02B93"/>
+      </a:accent5>
+      <a:accent6>
+        <a:srgbClr val="4EA72E"/>
+      </a:accent6>
+      <a:hlink>
+        <a:srgbClr val="467886"/>
+      </a:hlink>
+      <a:folHlink>
+        <a:srgbClr val="96607D"/>
+      </a:folHlink>
+    </a:clrScheme>
+    <a:fontScheme name="Office">
+      <a:majorFont>
+        <a:latin typeface="Aptos Display" panose="02110004020202020204"/>
+        <a:ea typeface=""/>
+        <a:cs typeface=""/>
+        <a:font script="Jpan" typeface="游ゴシック Light"/>
+        <a:font script="Hang" typeface="맑은 고딕"/>
+        <a:font script="Hans" typeface="等线 Light"/>
+        <a:font script="Hant" typeface="新細明體"/>
+        <a:font script="Arab" typeface="Times New Roman"/>
+        <a:font script="Hebr" typeface="Times New Roman"/>
+        <a:font script="Thai" typeface="Angsana New"/>
+        <a:font script="Ethi" typeface="Nyala"/>
+        <a:font script="Beng" typeface="Vrinda"/>
+        <a:font script="Gujr" typeface="Shruti"/>
+        <a:font script="Khmr" typeface="MoolBoran"/>
+        <a:font script="Knda" typeface="Tunga"/>
+        <a:font script="Guru" typeface="Raavi"/>
+        <a:font script="Cans" typeface="Euphemia"/>
+        <a:font script="Cher" typeface="Plantagenet Cherokee"/>
+        <a:font script="Yiii" typeface="Microsoft Yi Baiti"/>
+        <a:font script="Tibt" typeface="Microsoft Himalaya"/>
+        <a:font script="Thaa" typeface="MV Boli"/>
+        <a:font script="Deva" typeface="Mangal"/>
+        <a:font script="Telu" typeface="Gautami"/>
+        <a:font script="Taml" typeface="Latha"/>
+        <a:font script="Syrc" typeface="Estrangelo Edessa"/>
+        <a:font script="Orya" typeface="Kalinga"/>
+        <a:font script="Mlym" typeface="Kartika"/>
+        <a:font script="Laoo" typeface="DokChampa"/>
+        <a:font script="Sinh" typeface="Iskoola Pota"/>
+        <a:font script="Mong" typeface="Mongolian Baiti"/>
+        <a:font script="Viet" typeface="Times New Roman"/>
+        <a:font script="Uigh" typeface="Microsoft Uighur"/>
+        <a:font script="Geor" typeface="Sylfaen"/>
+        <a:font script="Armn" typeface="Arial"/>
+        <a:font script="Bugi" typeface="Leelawadee UI"/>
+        <a:font script="Bopo" typeface="Microsoft JhengHei"/>
+        <a:font script="Java" typeface="Javanese Text"/>
+        <a:font script="Lisu" typeface="Segoe UI"/>
+        <a:font script="Mymr" typeface="Myanmar Text"/>
+        <a:font script="Nkoo" typeface="Ebrima"/>
+        <a:font script="Olck" typeface="Nirmala UI"/>
+        <a:font script="Osma" typeface="Ebrima"/>
+        <a:font script="Phag" typeface="Phagspa"/>
+        <a:font script="Syrn" typeface="Estrangelo Edessa"/>
+        <a:font script="Syrj" typeface="Estrangelo Edessa"/>
+        <a:font script="Syre" typeface="Estrangelo Edessa"/>
+        <a:font script="Sora" typeface="Nirmala UI"/>
+        <a:font script="Tale" typeface="Microsoft Tai Le"/>
+        <a:font script="Talu" typeface="Microsoft New Tai Lue"/>
+        <a:font script="Tfng" typeface="Ebrima"/>
+      </a:majorFont>
+      <a:minorFont>
+        <a:latin typeface="Aptos" panose="02110004020202020204"/>
+        <a:ea typeface=""/>
+        <a:cs typeface=""/>
+        <a:font script="Jpan" typeface="游ゴシック"/>
+        <a:font script="Hang" typeface="맑은 고딕"/>
+        <a:font script="Hans" typeface="等线"/>
+        <a:font script="Hant" typeface="新細明體"/>
+        <a:font script="Arab" typeface="Arial"/>
+        <a:font script="Hebr" typeface="Arial"/>
+        <a:font script="Thai" typeface="Cordia New"/>
+        <a:font script="Ethi" typeface="Nyala"/>
+        <a:font script="Beng" typeface="Vrinda"/>
+        <a:font script="Gujr" typeface="Shruti"/>
+        <a:font script="Khmr" typeface="DaunPenh"/>
+        <a:font script="Knda" typeface="Tunga"/>
+        <a:font script="Guru" typeface="Raavi"/>
+        <a:font script="Cans" typeface="Euphemia"/>
+        <a:font script="Cher" typeface="Plantagenet Cherokee"/>
+        <a:font script="Yiii" typeface="Microsoft Yi Baiti"/>
+        <a:font script="Tibt" typeface="Microsoft Himalaya"/>
+        <a:font script="Thaa" typeface="MV Boli"/>
+        <a:font script="Deva" typeface="Mangal"/>
+        <a:font script="Telu" typeface="Gautami"/>
+        <a:font script="Taml" typeface="Latha"/>
+        <a:font script="Syrc" typeface="Estrangelo Edessa"/>
+        <a:font script="Orya" typeface="Kalinga"/>
+        <a:font script="Mlym" typeface="Kartika"/>
+        <a:font script="Laoo" typeface="DokChampa"/>
+        <a:font script="Sinh" typeface="Iskoola Pota"/>
+        <a:font script="Mong" typeface="Mongolian Baiti"/>
+        <a:font script="Viet" typeface="Arial"/>
+        <a:font script="Uigh" typeface="Microsoft Uighur"/>
+        <a:font script="Geor" typeface="Sylfaen"/>
+        <a:font script="Armn" typeface="Arial"/>
+        <a:font script="Bugi" typeface="Leelawadee UI"/>
+        <a:font script="Bopo" typeface="Microsoft JhengHei"/>
+        <a:font script="Java" typeface="Javanese Text"/>
+        <a:font script="Lisu" typeface="Segoe UI"/>
+        <a:font script="Mymr" typeface="Myanmar Text"/>
+        <a:font script="Nkoo" typeface="Ebrima"/>
+        <a:font script="Olck" typeface="Nirmala UI"/>
+        <a:font script="Osma" typeface="Ebrima"/>
+        <a:font script="Phag" typeface="Phagspa"/>
+        <a:font script="Syrn" typeface="Estrangelo Edessa"/>
+        <a:font script="Syrj" typeface="Estrangelo Edessa"/>
+        <a:font script="Syre" typeface="Estrangelo Edessa"/>
+        <a:font script="Sora" typeface="Nirmala UI"/>
+        <a:font script="Tale" typeface="Microsoft Tai Le"/>
+        <a:font script="Talu" typeface="Microsoft New Tai Lue"/>
+        <a:font script="Tfng" typeface="Ebrima"/>
+      </a:minorFont>
+    </a:fontScheme>
+    <a:fmtScheme name="Office">
+      <a:fillStyleLst>
+        <a:solidFill>
+          <a:schemeClr val="phClr"/>
+        </a:solidFill>
+        <a:gradFill rotWithShape="1">
+          <a:gsLst>
+            <a:gs pos="0">
+              <a:schemeClr val="phClr">
+                <a:lumMod val="110000"/>
+                <a:satMod val="105000"/>
+                <a:tint val="67000"/>
+              </a:schemeClr>
+            </a:gs>
+            <a:gs pos="50000">
+              <a:schemeClr val="phClr">
+                <a:lumMod val="105000"/>
+                <a:satMod val="103000"/>
+                <a:tint val="73000"/>
+              </a:schemeClr>
+            </a:gs>
+            <a:gs pos="100000">
+              <a:schemeClr val="phClr">
+                <a:lumMod val="105000"/>
+                <a:satMod val="109000"/>
+                <a:tint val="81000"/>
+              </a:schemeClr>
+            </a:gs>
+          </a:gsLst>
+          <a:lin ang="5400000" scaled="0"/>
+        </a:gradFill>
+        <a:gradFill rotWithShape="1">
+          <a:gsLst>
+            <a:gs pos="0">
+              <a:schemeClr val="phClr">
+                <a:satMod val="103000"/>
+                <a:lumMod val="102000"/>
+                <a:tint val="94000"/>
+              </a:schemeClr>
+            </a:gs>
+            <a:gs pos="50000">
+              <a:schemeClr val="phClr">
+                <a:satMod val="110000"/>
+                <a:lumMod val="100000"/>
+                <a:shade val="100000"/>
+              </a:schemeClr>
+            </a:gs>
+            <a:gs pos="100000">
+              <a:schemeClr val="phClr">
+                <a:lumMod val="99000"/>
+                <a:satMod val="120000"/>
+                <a:shade val="78000"/>
+              </a:schemeClr>
+            </a:gs>
+          </a:gsLst>
+          <a:lin ang="5400000" scaled="0"/>
+        </a:gradFill>
+      </a:fillStyleLst>
+      <a:lnStyleLst>
+        <a:ln w="12700" cap="flat" cmpd="sng" algn="ctr">
+          <a:solidFill>
+            <a:schemeClr val="phClr"/>
+          </a:solidFill>
+          <a:prstDash val="solid"/>
+          <a:miter lim="800000"/>
+        </a:ln>
+        <a:ln w="19050" cap="flat" cmpd="sng" algn="ctr">
+          <a:solidFill>
+            <a:schemeClr val="phClr"/>
+          </a:solidFill>
+          <a:prstDash val="solid"/>
+          <a:miter lim="800000"/>
+        </a:ln>
+        <a:ln w="25400" cap="flat" cmpd="sng" algn="ctr">
+          <a:solidFill>
+            <a:schemeClr val="phClr"/>
+          </a:solidFill>
+          <a:prstDash val="solid"/>
+          <a:miter lim="800000"/>
+        </a:ln>
+      </a:lnStyleLst>
+      <a:effectStyleLst>
+        <a:effectStyle>
+          <a:effectLst/>
+        </a:effectStyle>
+        <a:effectStyle>
+          <a:effectLst/>
+        </a:effectStyle>
+        <a:effectStyle>
+          <a:effectLst>
+            <a:outerShdw blurRad="57150" dist="19050" dir="5400000" algn="ctr" rotWithShape="0">
+              <a:srgbClr val="000000">
+                <a:alpha val="63000"/>
+              </a:srgbClr>
+            </a:outerShdw>
+          </a:effectLst>
+        </a:effectStyle>
+      </a:effectStyleLst>
+      <a:bgFillStyleLst>
+        <a:solidFill>
+          <a:schemeClr val="phClr"/>
+        </a:solidFill>
+        <a:solidFill>
+          <a:schemeClr val="phClr">
+            <a:tint val="95000"/>
+            <a:satMod val="170000"/>
+          </a:schemeClr>
+        </a:solidFill>
+        <a:gradFill rotWithShape="1">
+          <a:gsLst>
+            <a:gs pos="0">
+              <a:schemeClr val="phClr">
+                <a:tint val="93000"/>
+                <a:satMod val="150000"/>
+                <a:shade val="98000"/>
+                <a:lumMod val="102000"/>
+              </a:schemeClr>
+            </a:gs>
+            <a:gs pos="50000">
+              <a:schemeClr val="phClr">
+                <a:tint val="98000"/>
+                <a:satMod val="130000"/>
+                <a:shade val="90000"/>
+                <a:lumMod val="103000"/>
+              </a:schemeClr>
+            </a:gs>
+            <a:gs pos="100000">
+              <a:schemeClr val="phClr">
+                <a:shade val="63000"/>
+                <a:satMod val="120000"/>
+              </a:schemeClr>
+            </a:gs>
+          </a:gsLst>
+          <a:lin ang="5400000" scaled="0"/>
+        </a:gradFill>
+      </a:bgFillStyleLst>
+    </a:fmtScheme>
+  </a:themeElements>
+  <a:objectDefaults>
+    <a:lnDef>
+      <a:spPr/>
+      <a:bodyPr/>
+      <a:lstStyle/>
+      <a:style>
+        <a:lnRef idx="2">
+          <a:schemeClr val="accent1"/>
+        </a:lnRef>
+        <a:fillRef idx="0">
+          <a:schemeClr val="accent1"/>
+        </a:fillRef>
+        <a:effectRef idx="1">
+          <a:schemeClr val="accent1"/>
+        </a:effectRef>
+        <a:fontRef idx="minor">
+          <a:schemeClr val="tx1"/>
+        </a:fontRef>
+      </a:style>
+    </a:lnDef>
+  </a:objectDefaults>
+  <a:extraClrSchemeLst/>
+  <a:extLst>
+    <a:ext uri="{05A4C25C-085E-4340-85A3-A5531E510DB2}">
+      <thm15:themeFamily xmlns:thm15="http://schemas.microsoft.com/office/thememl/2012/main" name="Office Theme" id="{2E142A2C-CD16-42D6-873A-C26D2A0506FA}" vid="{1BDDFF52-6CD6-40A5-AB3C-68EB2F1E4D0A}"/>
+    </a:ext>
+  </a:extLst>
+</a:theme>
 </file>